--- a/slides/Module3_Prompt_Engineering.pptx
+++ b/slides/Module3_Prompt_Engineering.pptx
@@ -5,21 +5,21 @@
     <p:sldMasterId id="2147483648" r:id="rId1"/>
   </p:sldMasterIdLst>
   <p:sldIdLst>
-    <p:sldId id="256" r:id="rId7"/>
-    <p:sldId id="257" r:id="rId8"/>
-    <p:sldId id="258" r:id="rId9"/>
-    <p:sldId id="259" r:id="rId10"/>
-    <p:sldId id="260" r:id="rId11"/>
-    <p:sldId id="261" r:id="rId12"/>
-    <p:sldId id="262" r:id="rId13"/>
-    <p:sldId id="263" r:id="rId14"/>
-    <p:sldId id="264" r:id="rId15"/>
-    <p:sldId id="265" r:id="rId16"/>
-    <p:sldId id="266" r:id="rId17"/>
-    <p:sldId id="267" r:id="rId18"/>
-    <p:sldId id="268" r:id="rId19"/>
+    <p:sldId id="256" r:id="rId2"/>
+    <p:sldId id="257" r:id="rId3"/>
+    <p:sldId id="258" r:id="rId4"/>
+    <p:sldId id="259" r:id="rId5"/>
+    <p:sldId id="260" r:id="rId6"/>
+    <p:sldId id="261" r:id="rId7"/>
+    <p:sldId id="262" r:id="rId8"/>
+    <p:sldId id="263" r:id="rId9"/>
+    <p:sldId id="264" r:id="rId10"/>
+    <p:sldId id="265" r:id="rId11"/>
+    <p:sldId id="266" r:id="rId12"/>
+    <p:sldId id="267" r:id="rId13"/>
+    <p:sldId id="268" r:id="rId14"/>
   </p:sldIdLst>
-  <p:sldSz cx="12191695" cy="6858000" type="screen4x3"/>
+  <p:sldSz cx="12192000" cy="6858000"/>
   <p:notesSz cx="6858000" cy="9144000"/>
   <p:defaultTextStyle>
     <a:defPPr>
@@ -116,6 +116,22 @@
       </a:defRPr>
     </a:lvl9pPr>
   </p:defaultTextStyle>
+  <p:extLst>
+    <p:ext uri="{EFAFB233-063F-42B5-8137-9DF3F51BA10A}">
+      <p15:sldGuideLst xmlns:p15="http://schemas.microsoft.com/office/powerpoint/2012/main">
+        <p15:guide id="1" orient="horz" pos="2160">
+          <p15:clr>
+            <a:srgbClr val="A4A3A4"/>
+          </p15:clr>
+        </p15:guide>
+        <p15:guide id="2" pos="2880">
+          <p15:clr>
+            <a:srgbClr val="A4A3A4"/>
+          </p15:clr>
+        </p15:guide>
+      </p15:sldGuideLst>
+    </p:ext>
+  </p:extLst>
 </p:presentation>
 </file>
 
@@ -157,10 +173,9 @@
           <a:lstStyle/>
           <a:p>
             <a:r>
-              <a:rPr lang="en-US" smtClean="0"/>
+              <a:rPr lang="en-US"/>
               <a:t>Click to edit Master title style</a:t>
             </a:r>
-            <a:endParaRPr lang="en-US"/>
           </a:p>
         </p:txBody>
       </p:sp>
@@ -276,10 +291,9 @@
           </a:lstStyle>
           <a:p>
             <a:r>
-              <a:rPr lang="en-US" smtClean="0"/>
+              <a:rPr lang="en-US"/>
               <a:t>Click to edit Master subtitle style</a:t>
             </a:r>
-            <a:endParaRPr lang="en-US"/>
           </a:p>
         </p:txBody>
       </p:sp>
@@ -300,7 +314,7 @@
           <a:p>
             <a:fld id="{5BCAD085-E8A6-8845-BD4E-CB4CCA059FC4}" type="datetimeFigureOut">
               <a:rPr lang="en-US" smtClean="0"/>
-              <a:t>1/27/13</a:t>
+              <a:t>8/20/26</a:t>
             </a:fld>
             <a:endParaRPr lang="en-US"/>
           </a:p>
@@ -394,10 +408,9 @@
           <a:lstStyle/>
           <a:p>
             <a:r>
-              <a:rPr lang="en-US" smtClean="0"/>
+              <a:rPr lang="en-US"/>
               <a:t>Click to edit Master title style</a:t>
             </a:r>
-            <a:endParaRPr lang="en-US"/>
           </a:p>
         </p:txBody>
       </p:sp>
@@ -418,38 +431,37 @@
           <a:p>
             <a:pPr lvl="0"/>
             <a:r>
-              <a:rPr lang="en-US" smtClean="0"/>
+              <a:rPr lang="en-US"/>
               <a:t>Click to edit Master text styles</a:t>
             </a:r>
           </a:p>
           <a:p>
             <a:pPr lvl="1"/>
             <a:r>
-              <a:rPr lang="en-US" smtClean="0"/>
+              <a:rPr lang="en-US"/>
               <a:t>Second level</a:t>
             </a:r>
           </a:p>
           <a:p>
             <a:pPr lvl="2"/>
             <a:r>
-              <a:rPr lang="en-US" smtClean="0"/>
+              <a:rPr lang="en-US"/>
               <a:t>Third level</a:t>
             </a:r>
           </a:p>
           <a:p>
             <a:pPr lvl="3"/>
             <a:r>
-              <a:rPr lang="en-US" smtClean="0"/>
+              <a:rPr lang="en-US"/>
               <a:t>Fourth level</a:t>
             </a:r>
           </a:p>
           <a:p>
             <a:pPr lvl="4"/>
             <a:r>
-              <a:rPr lang="en-US" smtClean="0"/>
+              <a:rPr lang="en-US"/>
               <a:t>Fifth level</a:t>
             </a:r>
-            <a:endParaRPr lang="en-US"/>
           </a:p>
         </p:txBody>
       </p:sp>
@@ -470,7 +482,7 @@
           <a:p>
             <a:fld id="{5BCAD085-E8A6-8845-BD4E-CB4CCA059FC4}" type="datetimeFigureOut">
               <a:rPr lang="en-US" smtClean="0"/>
-              <a:t>1/27/13</a:t>
+              <a:t>8/20/26</a:t>
             </a:fld>
             <a:endParaRPr lang="en-US"/>
           </a:p>
@@ -569,10 +581,9 @@
           <a:lstStyle/>
           <a:p>
             <a:r>
-              <a:rPr lang="en-US" smtClean="0"/>
+              <a:rPr lang="en-US"/>
               <a:t>Click to edit Master title style</a:t>
             </a:r>
-            <a:endParaRPr lang="en-US"/>
           </a:p>
         </p:txBody>
       </p:sp>
@@ -598,38 +609,37 @@
           <a:p>
             <a:pPr lvl="0"/>
             <a:r>
-              <a:rPr lang="en-US" smtClean="0"/>
+              <a:rPr lang="en-US"/>
               <a:t>Click to edit Master text styles</a:t>
             </a:r>
           </a:p>
           <a:p>
             <a:pPr lvl="1"/>
             <a:r>
-              <a:rPr lang="en-US" smtClean="0"/>
+              <a:rPr lang="en-US"/>
               <a:t>Second level</a:t>
             </a:r>
           </a:p>
           <a:p>
             <a:pPr lvl="2"/>
             <a:r>
-              <a:rPr lang="en-US" smtClean="0"/>
+              <a:rPr lang="en-US"/>
               <a:t>Third level</a:t>
             </a:r>
           </a:p>
           <a:p>
             <a:pPr lvl="3"/>
             <a:r>
-              <a:rPr lang="en-US" smtClean="0"/>
+              <a:rPr lang="en-US"/>
               <a:t>Fourth level</a:t>
             </a:r>
           </a:p>
           <a:p>
             <a:pPr lvl="4"/>
             <a:r>
-              <a:rPr lang="en-US" smtClean="0"/>
+              <a:rPr lang="en-US"/>
               <a:t>Fifth level</a:t>
             </a:r>
-            <a:endParaRPr lang="en-US"/>
           </a:p>
         </p:txBody>
       </p:sp>
@@ -650,7 +660,7 @@
           <a:p>
             <a:fld id="{5BCAD085-E8A6-8845-BD4E-CB4CCA059FC4}" type="datetimeFigureOut">
               <a:rPr lang="en-US" smtClean="0"/>
-              <a:t>1/27/13</a:t>
+              <a:t>8/20/26</a:t>
             </a:fld>
             <a:endParaRPr lang="en-US"/>
           </a:p>
@@ -744,10 +754,9 @@
           <a:lstStyle/>
           <a:p>
             <a:r>
-              <a:rPr lang="en-US" smtClean="0"/>
+              <a:rPr lang="en-US"/>
               <a:t>Click to edit Master title style</a:t>
             </a:r>
-            <a:endParaRPr lang="en-US"/>
           </a:p>
         </p:txBody>
       </p:sp>
@@ -768,38 +777,37 @@
           <a:p>
             <a:pPr lvl="0"/>
             <a:r>
-              <a:rPr lang="en-US" smtClean="0"/>
+              <a:rPr lang="en-US"/>
               <a:t>Click to edit Master text styles</a:t>
             </a:r>
           </a:p>
           <a:p>
             <a:pPr lvl="1"/>
             <a:r>
-              <a:rPr lang="en-US" smtClean="0"/>
+              <a:rPr lang="en-US"/>
               <a:t>Second level</a:t>
             </a:r>
           </a:p>
           <a:p>
             <a:pPr lvl="2"/>
             <a:r>
-              <a:rPr lang="en-US" smtClean="0"/>
+              <a:rPr lang="en-US"/>
               <a:t>Third level</a:t>
             </a:r>
           </a:p>
           <a:p>
             <a:pPr lvl="3"/>
             <a:r>
-              <a:rPr lang="en-US" smtClean="0"/>
+              <a:rPr lang="en-US"/>
               <a:t>Fourth level</a:t>
             </a:r>
           </a:p>
           <a:p>
             <a:pPr lvl="4"/>
             <a:r>
-              <a:rPr lang="en-US" smtClean="0"/>
+              <a:rPr lang="en-US"/>
               <a:t>Fifth level</a:t>
             </a:r>
-            <a:endParaRPr lang="en-US"/>
           </a:p>
         </p:txBody>
       </p:sp>
@@ -820,7 +828,7 @@
           <a:p>
             <a:fld id="{5BCAD085-E8A6-8845-BD4E-CB4CCA059FC4}" type="datetimeFigureOut">
               <a:rPr lang="en-US" smtClean="0"/>
-              <a:t>1/27/13</a:t>
+              <a:t>8/20/26</a:t>
             </a:fld>
             <a:endParaRPr lang="en-US"/>
           </a:p>
@@ -923,10 +931,9 @@
           </a:lstStyle>
           <a:p>
             <a:r>
-              <a:rPr lang="en-US" smtClean="0"/>
+              <a:rPr lang="en-US"/>
               <a:t>Click to edit Master title style</a:t>
             </a:r>
-            <a:endParaRPr lang="en-US"/>
           </a:p>
         </p:txBody>
       </p:sp>
@@ -1043,7 +1050,7 @@
           <a:p>
             <a:pPr lvl="0"/>
             <a:r>
-              <a:rPr lang="en-US" smtClean="0"/>
+              <a:rPr lang="en-US"/>
               <a:t>Click to edit Master text styles</a:t>
             </a:r>
           </a:p>
@@ -1066,7 +1073,7 @@
           <a:p>
             <a:fld id="{5BCAD085-E8A6-8845-BD4E-CB4CCA059FC4}" type="datetimeFigureOut">
               <a:rPr lang="en-US" smtClean="0"/>
-              <a:t>1/27/13</a:t>
+              <a:t>8/20/26</a:t>
             </a:fld>
             <a:endParaRPr lang="en-US"/>
           </a:p>
@@ -1160,10 +1167,9 @@
           <a:lstStyle/>
           <a:p>
             <a:r>
-              <a:rPr lang="en-US" smtClean="0"/>
+              <a:rPr lang="en-US"/>
               <a:t>Click to edit Master title style</a:t>
             </a:r>
-            <a:endParaRPr lang="en-US"/>
           </a:p>
         </p:txBody>
       </p:sp>
@@ -1217,38 +1223,37 @@
           <a:p>
             <a:pPr lvl="0"/>
             <a:r>
-              <a:rPr lang="en-US" smtClean="0"/>
+              <a:rPr lang="en-US"/>
               <a:t>Click to edit Master text styles</a:t>
             </a:r>
           </a:p>
           <a:p>
             <a:pPr lvl="1"/>
             <a:r>
-              <a:rPr lang="en-US" smtClean="0"/>
+              <a:rPr lang="en-US"/>
               <a:t>Second level</a:t>
             </a:r>
           </a:p>
           <a:p>
             <a:pPr lvl="2"/>
             <a:r>
-              <a:rPr lang="en-US" smtClean="0"/>
+              <a:rPr lang="en-US"/>
               <a:t>Third level</a:t>
             </a:r>
           </a:p>
           <a:p>
             <a:pPr lvl="3"/>
             <a:r>
-              <a:rPr lang="en-US" smtClean="0"/>
+              <a:rPr lang="en-US"/>
               <a:t>Fourth level</a:t>
             </a:r>
           </a:p>
           <a:p>
             <a:pPr lvl="4"/>
             <a:r>
-              <a:rPr lang="en-US" smtClean="0"/>
+              <a:rPr lang="en-US"/>
               <a:t>Fifth level</a:t>
             </a:r>
-            <a:endParaRPr lang="en-US"/>
           </a:p>
         </p:txBody>
       </p:sp>
@@ -1302,38 +1307,37 @@
           <a:p>
             <a:pPr lvl="0"/>
             <a:r>
-              <a:rPr lang="en-US" smtClean="0"/>
+              <a:rPr lang="en-US"/>
               <a:t>Click to edit Master text styles</a:t>
             </a:r>
           </a:p>
           <a:p>
             <a:pPr lvl="1"/>
             <a:r>
-              <a:rPr lang="en-US" smtClean="0"/>
+              <a:rPr lang="en-US"/>
               <a:t>Second level</a:t>
             </a:r>
           </a:p>
           <a:p>
             <a:pPr lvl="2"/>
             <a:r>
-              <a:rPr lang="en-US" smtClean="0"/>
+              <a:rPr lang="en-US"/>
               <a:t>Third level</a:t>
             </a:r>
           </a:p>
           <a:p>
             <a:pPr lvl="3"/>
             <a:r>
-              <a:rPr lang="en-US" smtClean="0"/>
+              <a:rPr lang="en-US"/>
               <a:t>Fourth level</a:t>
             </a:r>
           </a:p>
           <a:p>
             <a:pPr lvl="4"/>
             <a:r>
-              <a:rPr lang="en-US" smtClean="0"/>
+              <a:rPr lang="en-US"/>
               <a:t>Fifth level</a:t>
             </a:r>
-            <a:endParaRPr lang="en-US"/>
           </a:p>
         </p:txBody>
       </p:sp>
@@ -1354,7 +1358,7 @@
           <a:p>
             <a:fld id="{5BCAD085-E8A6-8845-BD4E-CB4CCA059FC4}" type="datetimeFigureOut">
               <a:rPr lang="en-US" smtClean="0"/>
-              <a:t>1/27/13</a:t>
+              <a:t>8/20/26</a:t>
             </a:fld>
             <a:endParaRPr lang="en-US"/>
           </a:p>
@@ -1452,10 +1456,9 @@
           </a:lstStyle>
           <a:p>
             <a:r>
-              <a:rPr lang="en-US" smtClean="0"/>
+              <a:rPr lang="en-US"/>
               <a:t>Click to edit Master title style</a:t>
             </a:r>
-            <a:endParaRPr lang="en-US"/>
           </a:p>
         </p:txBody>
       </p:sp>
@@ -1518,7 +1521,7 @@
           <a:p>
             <a:pPr lvl="0"/>
             <a:r>
-              <a:rPr lang="en-US" smtClean="0"/>
+              <a:rPr lang="en-US"/>
               <a:t>Click to edit Master text styles</a:t>
             </a:r>
           </a:p>
@@ -1574,38 +1577,37 @@
           <a:p>
             <a:pPr lvl="0"/>
             <a:r>
-              <a:rPr lang="en-US" smtClean="0"/>
+              <a:rPr lang="en-US"/>
               <a:t>Click to edit Master text styles</a:t>
             </a:r>
           </a:p>
           <a:p>
             <a:pPr lvl="1"/>
             <a:r>
-              <a:rPr lang="en-US" smtClean="0"/>
+              <a:rPr lang="en-US"/>
               <a:t>Second level</a:t>
             </a:r>
           </a:p>
           <a:p>
             <a:pPr lvl="2"/>
             <a:r>
-              <a:rPr lang="en-US" smtClean="0"/>
+              <a:rPr lang="en-US"/>
               <a:t>Third level</a:t>
             </a:r>
           </a:p>
           <a:p>
             <a:pPr lvl="3"/>
             <a:r>
-              <a:rPr lang="en-US" smtClean="0"/>
+              <a:rPr lang="en-US"/>
               <a:t>Fourth level</a:t>
             </a:r>
           </a:p>
           <a:p>
             <a:pPr lvl="4"/>
             <a:r>
-              <a:rPr lang="en-US" smtClean="0"/>
+              <a:rPr lang="en-US"/>
               <a:t>Fifth level</a:t>
             </a:r>
-            <a:endParaRPr lang="en-US"/>
           </a:p>
         </p:txBody>
       </p:sp>
@@ -1668,7 +1670,7 @@
           <a:p>
             <a:pPr lvl="0"/>
             <a:r>
-              <a:rPr lang="en-US" smtClean="0"/>
+              <a:rPr lang="en-US"/>
               <a:t>Click to edit Master text styles</a:t>
             </a:r>
           </a:p>
@@ -1724,38 +1726,37 @@
           <a:p>
             <a:pPr lvl="0"/>
             <a:r>
-              <a:rPr lang="en-US" smtClean="0"/>
+              <a:rPr lang="en-US"/>
               <a:t>Click to edit Master text styles</a:t>
             </a:r>
           </a:p>
           <a:p>
             <a:pPr lvl="1"/>
             <a:r>
-              <a:rPr lang="en-US" smtClean="0"/>
+              <a:rPr lang="en-US"/>
               <a:t>Second level</a:t>
             </a:r>
           </a:p>
           <a:p>
             <a:pPr lvl="2"/>
             <a:r>
-              <a:rPr lang="en-US" smtClean="0"/>
+              <a:rPr lang="en-US"/>
               <a:t>Third level</a:t>
             </a:r>
           </a:p>
           <a:p>
             <a:pPr lvl="3"/>
             <a:r>
-              <a:rPr lang="en-US" smtClean="0"/>
+              <a:rPr lang="en-US"/>
               <a:t>Fourth level</a:t>
             </a:r>
           </a:p>
           <a:p>
             <a:pPr lvl="4"/>
             <a:r>
-              <a:rPr lang="en-US" smtClean="0"/>
+              <a:rPr lang="en-US"/>
               <a:t>Fifth level</a:t>
             </a:r>
-            <a:endParaRPr lang="en-US"/>
           </a:p>
         </p:txBody>
       </p:sp>
@@ -1776,7 +1777,7 @@
           <a:p>
             <a:fld id="{5BCAD085-E8A6-8845-BD4E-CB4CCA059FC4}" type="datetimeFigureOut">
               <a:rPr lang="en-US" smtClean="0"/>
-              <a:t>1/27/13</a:t>
+              <a:t>8/20/26</a:t>
             </a:fld>
             <a:endParaRPr lang="en-US"/>
           </a:p>
@@ -1870,10 +1871,9 @@
           <a:lstStyle/>
           <a:p>
             <a:r>
-              <a:rPr lang="en-US" smtClean="0"/>
+              <a:rPr lang="en-US"/>
               <a:t>Click to edit Master title style</a:t>
             </a:r>
-            <a:endParaRPr lang="en-US"/>
           </a:p>
         </p:txBody>
       </p:sp>
@@ -1894,7 +1894,7 @@
           <a:p>
             <a:fld id="{5BCAD085-E8A6-8845-BD4E-CB4CCA059FC4}" type="datetimeFigureOut">
               <a:rPr lang="en-US" smtClean="0"/>
-              <a:t>1/27/13</a:t>
+              <a:t>8/20/26</a:t>
             </a:fld>
             <a:endParaRPr lang="en-US"/>
           </a:p>
@@ -1989,7 +1989,7 @@
           <a:p>
             <a:fld id="{5BCAD085-E8A6-8845-BD4E-CB4CCA059FC4}" type="datetimeFigureOut">
               <a:rPr lang="en-US" smtClean="0"/>
-              <a:t>1/27/13</a:t>
+              <a:t>8/20/26</a:t>
             </a:fld>
             <a:endParaRPr lang="en-US"/>
           </a:p>
@@ -2092,10 +2092,9 @@
           </a:lstStyle>
           <a:p>
             <a:r>
-              <a:rPr lang="en-US" smtClean="0"/>
+              <a:rPr lang="en-US"/>
               <a:t>Click to edit Master title style</a:t>
             </a:r>
-            <a:endParaRPr lang="en-US"/>
           </a:p>
         </p:txBody>
       </p:sp>
@@ -2149,38 +2148,37 @@
           <a:p>
             <a:pPr lvl="0"/>
             <a:r>
-              <a:rPr lang="en-US" smtClean="0"/>
+              <a:rPr lang="en-US"/>
               <a:t>Click to edit Master text styles</a:t>
             </a:r>
           </a:p>
           <a:p>
             <a:pPr lvl="1"/>
             <a:r>
-              <a:rPr lang="en-US" smtClean="0"/>
+              <a:rPr lang="en-US"/>
               <a:t>Second level</a:t>
             </a:r>
           </a:p>
           <a:p>
             <a:pPr lvl="2"/>
             <a:r>
-              <a:rPr lang="en-US" smtClean="0"/>
+              <a:rPr lang="en-US"/>
               <a:t>Third level</a:t>
             </a:r>
           </a:p>
           <a:p>
             <a:pPr lvl="3"/>
             <a:r>
-              <a:rPr lang="en-US" smtClean="0"/>
+              <a:rPr lang="en-US"/>
               <a:t>Fourth level</a:t>
             </a:r>
           </a:p>
           <a:p>
             <a:pPr lvl="4"/>
             <a:r>
-              <a:rPr lang="en-US" smtClean="0"/>
+              <a:rPr lang="en-US"/>
               <a:t>Fifth level</a:t>
             </a:r>
-            <a:endParaRPr lang="en-US"/>
           </a:p>
         </p:txBody>
       </p:sp>
@@ -2243,7 +2241,7 @@
           <a:p>
             <a:pPr lvl="0"/>
             <a:r>
-              <a:rPr lang="en-US" smtClean="0"/>
+              <a:rPr lang="en-US"/>
               <a:t>Click to edit Master text styles</a:t>
             </a:r>
           </a:p>
@@ -2266,7 +2264,7 @@
           <a:p>
             <a:fld id="{5BCAD085-E8A6-8845-BD4E-CB4CCA059FC4}" type="datetimeFigureOut">
               <a:rPr lang="en-US" smtClean="0"/>
-              <a:t>1/27/13</a:t>
+              <a:t>8/20/26</a:t>
             </a:fld>
             <a:endParaRPr lang="en-US"/>
           </a:p>
@@ -2369,10 +2367,9 @@
           </a:lstStyle>
           <a:p>
             <a:r>
-              <a:rPr lang="en-US" smtClean="0"/>
+              <a:rPr lang="en-US"/>
               <a:t>Click to edit Master title style</a:t>
             </a:r>
-            <a:endParaRPr lang="en-US"/>
           </a:p>
         </p:txBody>
       </p:sp>
@@ -2496,7 +2493,7 @@
           <a:p>
             <a:pPr lvl="0"/>
             <a:r>
-              <a:rPr lang="en-US" smtClean="0"/>
+              <a:rPr lang="en-US"/>
               <a:t>Click to edit Master text styles</a:t>
             </a:r>
           </a:p>
@@ -2519,7 +2516,7 @@
           <a:p>
             <a:fld id="{5BCAD085-E8A6-8845-BD4E-CB4CCA059FC4}" type="datetimeFigureOut">
               <a:rPr lang="en-US" smtClean="0"/>
-              <a:t>1/27/13</a:t>
+              <a:t>8/20/26</a:t>
             </a:fld>
             <a:endParaRPr lang="en-US"/>
           </a:p>
@@ -2628,10 +2625,9 @@
           <a:lstStyle/>
           <a:p>
             <a:r>
-              <a:rPr lang="en-US" smtClean="0"/>
+              <a:rPr lang="en-US"/>
               <a:t>Click to edit Master title style</a:t>
             </a:r>
-            <a:endParaRPr lang="en-US"/>
           </a:p>
         </p:txBody>
       </p:sp>
@@ -2662,38 +2658,37 @@
           <a:p>
             <a:pPr lvl="0"/>
             <a:r>
-              <a:rPr lang="en-US" smtClean="0"/>
+              <a:rPr lang="en-US"/>
               <a:t>Click to edit Master text styles</a:t>
             </a:r>
           </a:p>
           <a:p>
             <a:pPr lvl="1"/>
             <a:r>
-              <a:rPr lang="en-US" smtClean="0"/>
+              <a:rPr lang="en-US"/>
               <a:t>Second level</a:t>
             </a:r>
           </a:p>
           <a:p>
             <a:pPr lvl="2"/>
             <a:r>
-              <a:rPr lang="en-US" smtClean="0"/>
+              <a:rPr lang="en-US"/>
               <a:t>Third level</a:t>
             </a:r>
           </a:p>
           <a:p>
             <a:pPr lvl="3"/>
             <a:r>
-              <a:rPr lang="en-US" smtClean="0"/>
+              <a:rPr lang="en-US"/>
               <a:t>Fourth level</a:t>
             </a:r>
           </a:p>
           <a:p>
             <a:pPr lvl="4"/>
             <a:r>
-              <a:rPr lang="en-US" smtClean="0"/>
+              <a:rPr lang="en-US"/>
               <a:t>Fifth level</a:t>
             </a:r>
-            <a:endParaRPr lang="en-US"/>
           </a:p>
         </p:txBody>
       </p:sp>
@@ -2732,7 +2727,7 @@
           <a:p>
             <a:fld id="{5BCAD085-E8A6-8845-BD4E-CB4CCA059FC4}" type="datetimeFigureOut">
               <a:rPr lang="en-US" smtClean="0"/>
-              <a:t>1/27/13</a:t>
+              <a:t>8/20/26</a:t>
             </a:fld>
             <a:endParaRPr lang="en-US"/>
           </a:p>
@@ -3091,7 +3086,7 @@
 </file>
 
 <file path=ppt/slides/slide1.xml><?xml version="1.0" encoding="utf-8"?>
-<p:sld xmlns:a="http://schemas.openxmlformats.org/drawingml/2006/main" xmlns:p="http://schemas.openxmlformats.org/presentationml/2006/main" xmlns:r="http://schemas.openxmlformats.org/officeDocument/2006/relationships">
+<p:sld xmlns:a="http://schemas.openxmlformats.org/drawingml/2006/main" xmlns:r="http://schemas.openxmlformats.org/officeDocument/2006/relationships" xmlns:p="http://schemas.openxmlformats.org/presentationml/2006/main">
   <p:cSld>
     <p:spTree>
       <p:nvGrpSpPr>
@@ -3099,7 +3094,14 @@
         <p:cNvGrpSpPr/>
         <p:nvPr/>
       </p:nvGrpSpPr>
-      <p:grpSpPr/>
+      <p:grpSpPr>
+        <a:xfrm>
+          <a:off x="0" y="0"/>
+          <a:ext cx="0" cy="0"/>
+          <a:chOff x="0" y="0"/>
+          <a:chExt cx="0" cy="0"/>
+        </a:xfrm>
+      </p:grpSpPr>
       <p:sp>
         <p:nvSpPr>
           <p:cNvPr id="2" name="Rectangle 1"/>
@@ -3141,6 +3143,7 @@
           <a:lstStyle/>
           <a:p>
             <a:pPr algn="ctr"/>
+            <a:endParaRPr/>
           </a:p>
         </p:txBody>
       </p:sp>
@@ -3185,6 +3188,7 @@
           <a:lstStyle/>
           <a:p>
             <a:pPr algn="ctr"/>
+            <a:endParaRPr/>
           </a:p>
         </p:txBody>
       </p:sp>
@@ -3229,6 +3233,7 @@
           <a:lstStyle/>
           <a:p>
             <a:pPr algn="ctr"/>
+            <a:endParaRPr/>
           </a:p>
         </p:txBody>
       </p:sp>
@@ -3253,13 +3258,6 @@
             <a:noFill/>
           </a:ln>
           <a:effectLst/>
-          <a:effectLst>
-            <a:outerShdw blurRad="60000" dist="25000" dir="5400000" rotWithShape="0">
-              <a:srgbClr val="1A1A2E">
-                <a:alpha val="22000"/>
-              </a:srgbClr>
-            </a:outerShdw>
-          </a:effectLst>
         </p:spPr>
         <p:style>
           <a:lnRef idx="1">
@@ -3280,6 +3278,7 @@
           <a:lstStyle/>
           <a:p>
             <a:pPr algn="ctr"/>
+            <a:endParaRPr/>
           </a:p>
         </p:txBody>
       </p:sp>
@@ -3324,6 +3323,7 @@
           <a:lstStyle/>
           <a:p>
             <a:pPr algn="ctr"/>
+            <a:endParaRPr/>
           </a:p>
         </p:txBody>
       </p:sp>
@@ -3344,7 +3344,7 @@
           <a:noFill/>
         </p:spPr>
         <p:txBody>
-          <a:bodyPr wrap="square" anchor="ctr" lIns="109728" rIns="109728" tIns="54864" bIns="54864">
+          <a:bodyPr wrap="square" lIns="109728" tIns="54864" rIns="109728" bIns="54864" anchor="ctr">
             <a:spAutoFit/>
           </a:bodyPr>
           <a:lstStyle/>
@@ -3405,7 +3405,7 @@
           <a:noFill/>
         </p:spPr>
         <p:txBody>
-          <a:bodyPr wrap="square" anchor="t" lIns="109728" rIns="109728" tIns="54864" bIns="54864">
+          <a:bodyPr wrap="square" lIns="109728" tIns="54864" rIns="109728" bIns="54864" anchor="t">
             <a:spAutoFit/>
           </a:bodyPr>
           <a:lstStyle/>
@@ -3447,7 +3447,7 @@
           <a:noFill/>
         </p:spPr>
         <p:txBody>
-          <a:bodyPr wrap="square" anchor="t" lIns="109728" rIns="109728" tIns="54864" bIns="54864">
+          <a:bodyPr wrap="square" lIns="109728" tIns="54864" rIns="109728" bIns="54864" anchor="t">
             <a:spAutoFit/>
           </a:bodyPr>
           <a:lstStyle/>
@@ -3489,7 +3489,7 @@
           <a:noFill/>
         </p:spPr>
         <p:txBody>
-          <a:bodyPr wrap="square" anchor="t" lIns="109728" rIns="109728" tIns="54864" bIns="54864">
+          <a:bodyPr wrap="square" lIns="109728" tIns="54864" rIns="109728" bIns="54864" anchor="t">
             <a:spAutoFit/>
           </a:bodyPr>
           <a:lstStyle/>
@@ -3531,7 +3531,7 @@
           <a:noFill/>
         </p:spPr>
         <p:txBody>
-          <a:bodyPr wrap="square" anchor="t" lIns="109728" rIns="109728" tIns="54864" bIns="54864">
+          <a:bodyPr wrap="square" lIns="109728" tIns="54864" rIns="109728" bIns="54864" anchor="t">
             <a:spAutoFit/>
           </a:bodyPr>
           <a:lstStyle/>
@@ -3595,7 +3595,7 @@
           </a:fontRef>
         </p:style>
         <p:txBody>
-          <a:bodyPr rtlCol="0" anchor="ctr" wrap="square" lIns="109728" rIns="109728" tIns="54864" bIns="54864"/>
+          <a:bodyPr wrap="square" lIns="109728" tIns="54864" rIns="109728" bIns="54864" rtlCol="0" anchor="ctr"/>
           <a:lstStyle/>
           <a:p>
             <a:pPr algn="ctr">
@@ -3657,7 +3657,7 @@
           </a:fontRef>
         </p:style>
         <p:txBody>
-          <a:bodyPr rtlCol="0" anchor="ctr" wrap="square" lIns="109728" rIns="109728" tIns="54864" bIns="54864"/>
+          <a:bodyPr wrap="square" lIns="109728" tIns="54864" rIns="109728" bIns="54864" rtlCol="0" anchor="ctr"/>
           <a:lstStyle/>
           <a:p>
             <a:pPr algn="ctr">
@@ -3719,7 +3719,7 @@
           </a:fontRef>
         </p:style>
         <p:txBody>
-          <a:bodyPr rtlCol="0" anchor="ctr" wrap="square" lIns="109728" rIns="109728" tIns="54864" bIns="54864"/>
+          <a:bodyPr wrap="square" lIns="109728" tIns="54864" rIns="109728" bIns="54864" rtlCol="0" anchor="ctr"/>
           <a:lstStyle/>
           <a:p>
             <a:pPr algn="ctr">
@@ -3759,7 +3759,7 @@
           <a:noFill/>
         </p:spPr>
         <p:txBody>
-          <a:bodyPr wrap="square" anchor="t" lIns="109728" rIns="109728" tIns="54864" bIns="54864">
+          <a:bodyPr wrap="square" lIns="109728" tIns="54864" rIns="109728" bIns="54864" anchor="t">
             <a:spAutoFit/>
           </a:bodyPr>
           <a:lstStyle/>
@@ -3784,6 +3784,36 @@
           </a:p>
         </p:txBody>
       </p:sp>
+      <p:pic>
+        <p:nvPicPr>
+          <p:cNvPr id="16" name="Picture 15" descr="Evolve Security 2026 Company Profile: Valuation, Funding &amp; Investors |  PitchBook">
+            <a:extLst>
+              <a:ext uri="{FF2B5EF4-FFF2-40B4-BE49-F238E27FC236}">
+                <a16:creationId xmlns:a16="http://schemas.microsoft.com/office/drawing/2014/main" id="{9853B212-2F8A-EAB6-FC6F-3D75DE361A47}"/>
+              </a:ext>
+            </a:extLst>
+          </p:cNvPr>
+          <p:cNvPicPr>
+            <a:picLocks noChangeAspect="1"/>
+          </p:cNvPicPr>
+          <p:nvPr/>
+        </p:nvPicPr>
+        <p:blipFill>
+          <a:blip r:embed="rId2"/>
+          <a:stretch>
+            <a:fillRect/>
+          </a:stretch>
+        </p:blipFill>
+        <p:spPr>
+          <a:xfrm>
+            <a:off x="3927856" y="-320358"/>
+            <a:ext cx="1787144" cy="1787144"/>
+          </a:xfrm>
+          <a:prstGeom prst="rect">
+            <a:avLst/>
+          </a:prstGeom>
+        </p:spPr>
+      </p:pic>
     </p:spTree>
   </p:cSld>
   <p:clrMapOvr>
@@ -3793,7 +3823,7 @@
 </file>
 
 <file path=ppt/slides/slide10.xml><?xml version="1.0" encoding="utf-8"?>
-<p:sld xmlns:a="http://schemas.openxmlformats.org/drawingml/2006/main" xmlns:p="http://schemas.openxmlformats.org/presentationml/2006/main" xmlns:r="http://schemas.openxmlformats.org/officeDocument/2006/relationships">
+<p:sld xmlns:a="http://schemas.openxmlformats.org/drawingml/2006/main" xmlns:r="http://schemas.openxmlformats.org/officeDocument/2006/relationships" xmlns:p="http://schemas.openxmlformats.org/presentationml/2006/main">
   <p:cSld>
     <p:spTree>
       <p:nvGrpSpPr>
@@ -3801,7 +3831,14 @@
         <p:cNvGrpSpPr/>
         <p:nvPr/>
       </p:nvGrpSpPr>
-      <p:grpSpPr/>
+      <p:grpSpPr>
+        <a:xfrm>
+          <a:off x="0" y="0"/>
+          <a:ext cx="0" cy="0"/>
+          <a:chOff x="0" y="0"/>
+          <a:chExt cx="0" cy="0"/>
+        </a:xfrm>
+      </p:grpSpPr>
       <p:sp>
         <p:nvSpPr>
           <p:cNvPr id="2" name="Rectangle 1"/>
@@ -3843,6 +3880,7 @@
           <a:lstStyle/>
           <a:p>
             <a:pPr algn="ctr"/>
+            <a:endParaRPr/>
           </a:p>
         </p:txBody>
       </p:sp>
@@ -3887,6 +3925,7 @@
           <a:lstStyle/>
           <a:p>
             <a:pPr algn="ctr"/>
+            <a:endParaRPr/>
           </a:p>
         </p:txBody>
       </p:sp>
@@ -3907,7 +3946,7 @@
           <a:noFill/>
         </p:spPr>
         <p:txBody>
-          <a:bodyPr wrap="square" anchor="t" lIns="109728" rIns="109728" tIns="54864" bIns="54864">
+          <a:bodyPr wrap="square" lIns="109728" tIns="54864" rIns="109728" bIns="54864" anchor="t">
             <a:spAutoFit/>
           </a:bodyPr>
           <a:lstStyle/>
@@ -3949,7 +3988,7 @@
           <a:noFill/>
         </p:spPr>
         <p:txBody>
-          <a:bodyPr wrap="square" anchor="ctr" lIns="109728" rIns="109728" tIns="54864" bIns="54864">
+          <a:bodyPr wrap="square" lIns="109728" tIns="54864" rIns="109728" bIns="54864" anchor="ctr">
             <a:spAutoFit/>
           </a:bodyPr>
           <a:lstStyle/>
@@ -4015,6 +4054,7 @@
           <a:lstStyle/>
           <a:p>
             <a:pPr algn="ctr"/>
+            <a:endParaRPr/>
           </a:p>
         </p:txBody>
       </p:sp>
@@ -4035,7 +4075,7 @@
           <a:noFill/>
         </p:spPr>
         <p:txBody>
-          <a:bodyPr wrap="square" anchor="ctr" lIns="109728" rIns="109728" tIns="54864" bIns="54864">
+          <a:bodyPr wrap="square" lIns="109728" tIns="54864" rIns="109728" bIns="54864" anchor="ctr">
             <a:spAutoFit/>
           </a:bodyPr>
           <a:lstStyle/>
@@ -4077,7 +4117,7 @@
           <a:noFill/>
         </p:spPr>
         <p:txBody>
-          <a:bodyPr wrap="square" anchor="ctr" lIns="109728" rIns="109728" tIns="54864" bIns="54864">
+          <a:bodyPr wrap="square" lIns="109728" tIns="54864" rIns="109728" bIns="54864" anchor="ctr">
             <a:spAutoFit/>
           </a:bodyPr>
           <a:lstStyle/>
@@ -4127,13 +4167,6 @@
             </a:solidFill>
           </a:ln>
           <a:effectLst/>
-          <a:effectLst>
-            <a:outerShdw blurRad="60000" dist="25000" dir="5400000" rotWithShape="0">
-              <a:srgbClr val="1A1A2E">
-                <a:alpha val="22000"/>
-              </a:srgbClr>
-            </a:outerShdw>
-          </a:effectLst>
         </p:spPr>
         <p:style>
           <a:lnRef idx="1">
@@ -4154,6 +4187,7 @@
           <a:lstStyle/>
           <a:p>
             <a:pPr algn="ctr"/>
+            <a:endParaRPr/>
           </a:p>
         </p:txBody>
       </p:sp>
@@ -4198,6 +4232,7 @@
           <a:lstStyle/>
           <a:p>
             <a:pPr algn="ctr"/>
+            <a:endParaRPr/>
           </a:p>
         </p:txBody>
       </p:sp>
@@ -4218,7 +4253,7 @@
           <a:noFill/>
         </p:spPr>
         <p:txBody>
-          <a:bodyPr wrap="square" anchor="ctr" lIns="109728" rIns="109728" tIns="54864" bIns="54864">
+          <a:bodyPr wrap="square" lIns="109728" tIns="54864" rIns="109728" bIns="54864" anchor="ctr">
             <a:spAutoFit/>
           </a:bodyPr>
           <a:lstStyle/>
@@ -4260,7 +4295,7 @@
           <a:noFill/>
         </p:spPr>
         <p:txBody>
-          <a:bodyPr wrap="square" anchor="ctr" lIns="109728" rIns="109728" tIns="54864" bIns="54864">
+          <a:bodyPr wrap="square" lIns="109728" tIns="54864" rIns="109728" bIns="54864" anchor="ctr">
             <a:spAutoFit/>
           </a:bodyPr>
           <a:lstStyle/>
@@ -4326,6 +4361,7 @@
           <a:lstStyle/>
           <a:p>
             <a:pPr algn="ctr"/>
+            <a:endParaRPr/>
           </a:p>
         </p:txBody>
       </p:sp>
@@ -4354,13 +4390,6 @@
             </a:solidFill>
           </a:ln>
           <a:effectLst/>
-          <a:effectLst>
-            <a:outerShdw blurRad="60000" dist="25000" dir="5400000" rotWithShape="0">
-              <a:srgbClr val="1A1A2E">
-                <a:alpha val="22000"/>
-              </a:srgbClr>
-            </a:outerShdw>
-          </a:effectLst>
         </p:spPr>
         <p:style>
           <a:lnRef idx="1">
@@ -4381,6 +4410,7 @@
           <a:lstStyle/>
           <a:p>
             <a:pPr algn="ctr"/>
+            <a:endParaRPr/>
           </a:p>
         </p:txBody>
       </p:sp>
@@ -4425,6 +4455,7 @@
           <a:lstStyle/>
           <a:p>
             <a:pPr algn="ctr"/>
+            <a:endParaRPr/>
           </a:p>
         </p:txBody>
       </p:sp>
@@ -4445,7 +4476,7 @@
           <a:noFill/>
         </p:spPr>
         <p:txBody>
-          <a:bodyPr wrap="square" anchor="ctr" lIns="109728" rIns="109728" tIns="54864" bIns="54864">
+          <a:bodyPr wrap="square" lIns="109728" tIns="54864" rIns="109728" bIns="54864" anchor="ctr">
             <a:spAutoFit/>
           </a:bodyPr>
           <a:lstStyle/>
@@ -4487,7 +4518,7 @@
           <a:noFill/>
         </p:spPr>
         <p:txBody>
-          <a:bodyPr wrap="square" anchor="ctr" lIns="109728" rIns="109728" tIns="54864" bIns="54864">
+          <a:bodyPr wrap="square" lIns="109728" tIns="54864" rIns="109728" bIns="54864" anchor="ctr">
             <a:spAutoFit/>
           </a:bodyPr>
           <a:lstStyle/>
@@ -4553,6 +4584,7 @@
           <a:lstStyle/>
           <a:p>
             <a:pPr algn="ctr"/>
+            <a:endParaRPr/>
           </a:p>
         </p:txBody>
       </p:sp>
@@ -4581,13 +4613,6 @@
             </a:solidFill>
           </a:ln>
           <a:effectLst/>
-          <a:effectLst>
-            <a:outerShdw blurRad="60000" dist="25000" dir="5400000" rotWithShape="0">
-              <a:srgbClr val="1A1A2E">
-                <a:alpha val="22000"/>
-              </a:srgbClr>
-            </a:outerShdw>
-          </a:effectLst>
         </p:spPr>
         <p:style>
           <a:lnRef idx="1">
@@ -4608,6 +4633,7 @@
           <a:lstStyle/>
           <a:p>
             <a:pPr algn="ctr"/>
+            <a:endParaRPr/>
           </a:p>
         </p:txBody>
       </p:sp>
@@ -4652,6 +4678,7 @@
           <a:lstStyle/>
           <a:p>
             <a:pPr algn="ctr"/>
+            <a:endParaRPr/>
           </a:p>
         </p:txBody>
       </p:sp>
@@ -4672,7 +4699,7 @@
           <a:noFill/>
         </p:spPr>
         <p:txBody>
-          <a:bodyPr wrap="square" anchor="ctr" lIns="109728" rIns="109728" tIns="54864" bIns="54864">
+          <a:bodyPr wrap="square" lIns="109728" tIns="54864" rIns="109728" bIns="54864" anchor="ctr">
             <a:spAutoFit/>
           </a:bodyPr>
           <a:lstStyle/>
@@ -4714,7 +4741,7 @@
           <a:noFill/>
         </p:spPr>
         <p:txBody>
-          <a:bodyPr wrap="square" anchor="ctr" lIns="109728" rIns="109728" tIns="54864" bIns="54864">
+          <a:bodyPr wrap="square" lIns="109728" tIns="54864" rIns="109728" bIns="54864" anchor="ctr">
             <a:spAutoFit/>
           </a:bodyPr>
           <a:lstStyle/>
@@ -4780,6 +4807,7 @@
           <a:lstStyle/>
           <a:p>
             <a:pPr algn="ctr"/>
+            <a:endParaRPr/>
           </a:p>
         </p:txBody>
       </p:sp>
@@ -4808,13 +4836,6 @@
             </a:solidFill>
           </a:ln>
           <a:effectLst/>
-          <a:effectLst>
-            <a:outerShdw blurRad="60000" dist="25000" dir="5400000" rotWithShape="0">
-              <a:srgbClr val="1A1A2E">
-                <a:alpha val="22000"/>
-              </a:srgbClr>
-            </a:outerShdw>
-          </a:effectLst>
         </p:spPr>
         <p:style>
           <a:lnRef idx="1">
@@ -4835,6 +4856,7 @@
           <a:lstStyle/>
           <a:p>
             <a:pPr algn="ctr"/>
+            <a:endParaRPr/>
           </a:p>
         </p:txBody>
       </p:sp>
@@ -4879,6 +4901,7 @@
           <a:lstStyle/>
           <a:p>
             <a:pPr algn="ctr"/>
+            <a:endParaRPr/>
           </a:p>
         </p:txBody>
       </p:sp>
@@ -4899,7 +4922,7 @@
           <a:noFill/>
         </p:spPr>
         <p:txBody>
-          <a:bodyPr wrap="square" anchor="ctr" lIns="109728" rIns="109728" tIns="54864" bIns="54864">
+          <a:bodyPr wrap="square" lIns="109728" tIns="54864" rIns="109728" bIns="54864" anchor="ctr">
             <a:spAutoFit/>
           </a:bodyPr>
           <a:lstStyle/>
@@ -4941,7 +4964,7 @@
           <a:noFill/>
         </p:spPr>
         <p:txBody>
-          <a:bodyPr wrap="square" anchor="ctr" lIns="109728" rIns="109728" tIns="54864" bIns="54864">
+          <a:bodyPr wrap="square" lIns="109728" tIns="54864" rIns="109728" bIns="54864" anchor="ctr">
             <a:spAutoFit/>
           </a:bodyPr>
           <a:lstStyle/>
@@ -4983,7 +5006,7 @@
           <a:noFill/>
         </p:spPr>
         <p:txBody>
-          <a:bodyPr wrap="square" anchor="t" lIns="109728" rIns="109728" tIns="54864" bIns="54864">
+          <a:bodyPr wrap="square" lIns="109728" tIns="54864" rIns="109728" bIns="54864" anchor="t">
             <a:spAutoFit/>
           </a:bodyPr>
           <a:lstStyle/>
@@ -5017,7 +5040,7 @@
 </file>
 
 <file path=ppt/slides/slide11.xml><?xml version="1.0" encoding="utf-8"?>
-<p:sld xmlns:a="http://schemas.openxmlformats.org/drawingml/2006/main" xmlns:p="http://schemas.openxmlformats.org/presentationml/2006/main" xmlns:r="http://schemas.openxmlformats.org/officeDocument/2006/relationships">
+<p:sld xmlns:a="http://schemas.openxmlformats.org/drawingml/2006/main" xmlns:r="http://schemas.openxmlformats.org/officeDocument/2006/relationships" xmlns:p="http://schemas.openxmlformats.org/presentationml/2006/main">
   <p:cSld>
     <p:spTree>
       <p:nvGrpSpPr>
@@ -5025,7 +5048,14 @@
         <p:cNvGrpSpPr/>
         <p:nvPr/>
       </p:nvGrpSpPr>
-      <p:grpSpPr/>
+      <p:grpSpPr>
+        <a:xfrm>
+          <a:off x="0" y="0"/>
+          <a:ext cx="0" cy="0"/>
+          <a:chOff x="0" y="0"/>
+          <a:chExt cx="0" cy="0"/>
+        </a:xfrm>
+      </p:grpSpPr>
       <p:sp>
         <p:nvSpPr>
           <p:cNvPr id="2" name="Rectangle 1"/>
@@ -5067,6 +5097,7 @@
           <a:lstStyle/>
           <a:p>
             <a:pPr algn="ctr"/>
+            <a:endParaRPr/>
           </a:p>
         </p:txBody>
       </p:sp>
@@ -5111,6 +5142,7 @@
           <a:lstStyle/>
           <a:p>
             <a:pPr algn="ctr"/>
+            <a:endParaRPr/>
           </a:p>
         </p:txBody>
       </p:sp>
@@ -5131,7 +5163,7 @@
           <a:noFill/>
         </p:spPr>
         <p:txBody>
-          <a:bodyPr wrap="square" anchor="t" lIns="109728" rIns="109728" tIns="54864" bIns="54864">
+          <a:bodyPr wrap="square" lIns="109728" tIns="54864" rIns="109728" bIns="54864" anchor="t">
             <a:spAutoFit/>
           </a:bodyPr>
           <a:lstStyle/>
@@ -5173,7 +5205,7 @@
           <a:noFill/>
         </p:spPr>
         <p:txBody>
-          <a:bodyPr wrap="square" anchor="ctr" lIns="109728" rIns="109728" tIns="54864" bIns="54864">
+          <a:bodyPr wrap="square" lIns="109728" tIns="54864" rIns="109728" bIns="54864" anchor="ctr">
             <a:spAutoFit/>
           </a:bodyPr>
           <a:lstStyle/>
@@ -5239,6 +5271,7 @@
           <a:lstStyle/>
           <a:p>
             <a:pPr algn="ctr"/>
+            <a:endParaRPr/>
           </a:p>
         </p:txBody>
       </p:sp>
@@ -5259,7 +5292,7 @@
           <a:noFill/>
         </p:spPr>
         <p:txBody>
-          <a:bodyPr wrap="square" anchor="ctr" lIns="109728" rIns="109728" tIns="54864" bIns="54864">
+          <a:bodyPr wrap="square" lIns="109728" tIns="54864" rIns="109728" bIns="54864" anchor="ctr">
             <a:spAutoFit/>
           </a:bodyPr>
           <a:lstStyle/>
@@ -5301,7 +5334,7 @@
           <a:noFill/>
         </p:spPr>
         <p:txBody>
-          <a:bodyPr wrap="square" anchor="ctr" lIns="109728" rIns="109728" tIns="54864" bIns="54864">
+          <a:bodyPr wrap="square" lIns="109728" tIns="54864" rIns="109728" bIns="54864" anchor="ctr">
             <a:spAutoFit/>
           </a:bodyPr>
           <a:lstStyle/>
@@ -5369,6 +5402,7 @@
           <a:lstStyle/>
           <a:p>
             <a:pPr algn="ctr"/>
+            <a:endParaRPr/>
           </a:p>
         </p:txBody>
       </p:sp>
@@ -5409,7 +5443,7 @@
           </a:fontRef>
         </p:style>
         <p:txBody>
-          <a:bodyPr rtlCol="0" anchor="ctr" wrap="square" lIns="109728" rIns="109728" tIns="54864" bIns="54864"/>
+          <a:bodyPr wrap="square" lIns="109728" tIns="54864" rIns="109728" bIns="54864" rtlCol="0" anchor="ctr"/>
           <a:lstStyle/>
           <a:p>
             <a:pPr algn="ctr">
@@ -5449,7 +5483,7 @@
           <a:noFill/>
         </p:spPr>
         <p:txBody>
-          <a:bodyPr wrap="square" anchor="ctr" lIns="109728" rIns="109728" tIns="54864" bIns="54864">
+          <a:bodyPr wrap="square" lIns="109728" tIns="54864" rIns="109728" bIns="54864" anchor="ctr">
             <a:spAutoFit/>
           </a:bodyPr>
           <a:lstStyle/>
@@ -5536,6 +5570,7 @@
           <a:lstStyle/>
           <a:p>
             <a:pPr algn="ctr"/>
+            <a:endParaRPr/>
           </a:p>
         </p:txBody>
       </p:sp>
@@ -5576,7 +5611,7 @@
           </a:fontRef>
         </p:style>
         <p:txBody>
-          <a:bodyPr rtlCol="0" anchor="ctr" wrap="square" lIns="109728" rIns="109728" tIns="54864" bIns="54864"/>
+          <a:bodyPr wrap="square" lIns="109728" tIns="54864" rIns="109728" bIns="54864" rtlCol="0" anchor="ctr"/>
           <a:lstStyle/>
           <a:p>
             <a:pPr algn="ctr">
@@ -5616,7 +5651,7 @@
           <a:noFill/>
         </p:spPr>
         <p:txBody>
-          <a:bodyPr wrap="square" anchor="ctr" lIns="109728" rIns="109728" tIns="54864" bIns="54864">
+          <a:bodyPr wrap="square" lIns="109728" tIns="54864" rIns="109728" bIns="54864" anchor="ctr">
             <a:spAutoFit/>
           </a:bodyPr>
           <a:lstStyle/>
@@ -5703,6 +5738,7 @@
           <a:lstStyle/>
           <a:p>
             <a:pPr algn="ctr"/>
+            <a:endParaRPr/>
           </a:p>
         </p:txBody>
       </p:sp>
@@ -5743,7 +5779,7 @@
           </a:fontRef>
         </p:style>
         <p:txBody>
-          <a:bodyPr rtlCol="0" anchor="ctr" wrap="square" lIns="109728" rIns="109728" tIns="54864" bIns="54864"/>
+          <a:bodyPr wrap="square" lIns="109728" tIns="54864" rIns="109728" bIns="54864" rtlCol="0" anchor="ctr"/>
           <a:lstStyle/>
           <a:p>
             <a:pPr algn="ctr">
@@ -5783,7 +5819,7 @@
           <a:noFill/>
         </p:spPr>
         <p:txBody>
-          <a:bodyPr wrap="square" anchor="ctr" lIns="109728" rIns="109728" tIns="54864" bIns="54864">
+          <a:bodyPr wrap="square" lIns="109728" tIns="54864" rIns="109728" bIns="54864" anchor="ctr">
             <a:spAutoFit/>
           </a:bodyPr>
           <a:lstStyle/>
@@ -5836,7 +5872,7 @@
 </file>
 
 <file path=ppt/slides/slide12.xml><?xml version="1.0" encoding="utf-8"?>
-<p:sld xmlns:a="http://schemas.openxmlformats.org/drawingml/2006/main" xmlns:p="http://schemas.openxmlformats.org/presentationml/2006/main" xmlns:r="http://schemas.openxmlformats.org/officeDocument/2006/relationships">
+<p:sld xmlns:a="http://schemas.openxmlformats.org/drawingml/2006/main" xmlns:r="http://schemas.openxmlformats.org/officeDocument/2006/relationships" xmlns:p="http://schemas.openxmlformats.org/presentationml/2006/main">
   <p:cSld>
     <p:spTree>
       <p:nvGrpSpPr>
@@ -5844,7 +5880,14 @@
         <p:cNvGrpSpPr/>
         <p:nvPr/>
       </p:nvGrpSpPr>
-      <p:grpSpPr/>
+      <p:grpSpPr>
+        <a:xfrm>
+          <a:off x="0" y="0"/>
+          <a:ext cx="0" cy="0"/>
+          <a:chOff x="0" y="0"/>
+          <a:chExt cx="0" cy="0"/>
+        </a:xfrm>
+      </p:grpSpPr>
       <p:sp>
         <p:nvSpPr>
           <p:cNvPr id="2" name="Rectangle 1"/>
@@ -5886,6 +5929,7 @@
           <a:lstStyle/>
           <a:p>
             <a:pPr algn="ctr"/>
+            <a:endParaRPr/>
           </a:p>
         </p:txBody>
       </p:sp>
@@ -5930,6 +5974,7 @@
           <a:lstStyle/>
           <a:p>
             <a:pPr algn="ctr"/>
+            <a:endParaRPr/>
           </a:p>
         </p:txBody>
       </p:sp>
@@ -5950,7 +5995,7 @@
           <a:noFill/>
         </p:spPr>
         <p:txBody>
-          <a:bodyPr wrap="square" anchor="t" lIns="109728" rIns="109728" tIns="54864" bIns="54864">
+          <a:bodyPr wrap="square" lIns="109728" tIns="54864" rIns="109728" bIns="54864" anchor="t">
             <a:spAutoFit/>
           </a:bodyPr>
           <a:lstStyle/>
@@ -5992,7 +6037,7 @@
           <a:noFill/>
         </p:spPr>
         <p:txBody>
-          <a:bodyPr wrap="square" anchor="ctr" lIns="109728" rIns="109728" tIns="54864" bIns="54864">
+          <a:bodyPr wrap="square" lIns="109728" tIns="54864" rIns="109728" bIns="54864" anchor="ctr">
             <a:spAutoFit/>
           </a:bodyPr>
           <a:lstStyle/>
@@ -6058,6 +6103,7 @@
           <a:lstStyle/>
           <a:p>
             <a:pPr algn="ctr"/>
+            <a:endParaRPr/>
           </a:p>
         </p:txBody>
       </p:sp>
@@ -6078,7 +6124,7 @@
           <a:noFill/>
         </p:spPr>
         <p:txBody>
-          <a:bodyPr wrap="square" anchor="ctr" lIns="109728" rIns="109728" tIns="54864" bIns="54864">
+          <a:bodyPr wrap="square" lIns="109728" tIns="54864" rIns="109728" bIns="54864" anchor="ctr">
             <a:spAutoFit/>
           </a:bodyPr>
           <a:lstStyle/>
@@ -6120,7 +6166,7 @@
           <a:noFill/>
         </p:spPr>
         <p:txBody>
-          <a:bodyPr wrap="square" anchor="ctr" lIns="109728" rIns="109728" tIns="54864" bIns="54864">
+          <a:bodyPr wrap="square" lIns="109728" tIns="54864" rIns="109728" bIns="54864" anchor="ctr">
             <a:spAutoFit/>
           </a:bodyPr>
           <a:lstStyle/>
@@ -6190,6 +6236,7 @@
           <a:lstStyle/>
           <a:p>
             <a:pPr algn="ctr"/>
+            <a:endParaRPr/>
           </a:p>
         </p:txBody>
       </p:sp>
@@ -6230,7 +6277,7 @@
           </a:fontRef>
         </p:style>
         <p:txBody>
-          <a:bodyPr rtlCol="0" anchor="ctr" wrap="square" lIns="109728" rIns="109728" tIns="54864" bIns="54864"/>
+          <a:bodyPr wrap="square" lIns="109728" tIns="54864" rIns="109728" bIns="54864" rtlCol="0" anchor="ctr"/>
           <a:lstStyle/>
           <a:p>
             <a:pPr algn="ctr">
@@ -6270,7 +6317,7 @@
           <a:noFill/>
         </p:spPr>
         <p:txBody>
-          <a:bodyPr wrap="square" anchor="ctr" lIns="109728" rIns="109728" tIns="54864" bIns="54864">
+          <a:bodyPr wrap="square" lIns="109728" tIns="54864" rIns="109728" bIns="54864" anchor="ctr">
             <a:spAutoFit/>
           </a:bodyPr>
           <a:lstStyle/>
@@ -6340,6 +6387,7 @@
           <a:lstStyle/>
           <a:p>
             <a:pPr algn="ctr"/>
+            <a:endParaRPr/>
           </a:p>
         </p:txBody>
       </p:sp>
@@ -6380,7 +6428,7 @@
           </a:fontRef>
         </p:style>
         <p:txBody>
-          <a:bodyPr rtlCol="0" anchor="ctr" wrap="square" lIns="109728" rIns="109728" tIns="54864" bIns="54864"/>
+          <a:bodyPr wrap="square" lIns="109728" tIns="54864" rIns="109728" bIns="54864" rtlCol="0" anchor="ctr"/>
           <a:lstStyle/>
           <a:p>
             <a:pPr algn="ctr">
@@ -6420,7 +6468,7 @@
           <a:noFill/>
         </p:spPr>
         <p:txBody>
-          <a:bodyPr wrap="square" anchor="ctr" lIns="109728" rIns="109728" tIns="54864" bIns="54864">
+          <a:bodyPr wrap="square" lIns="109728" tIns="54864" rIns="109728" bIns="54864" anchor="ctr">
             <a:spAutoFit/>
           </a:bodyPr>
           <a:lstStyle/>
@@ -6490,6 +6538,7 @@
           <a:lstStyle/>
           <a:p>
             <a:pPr algn="ctr"/>
+            <a:endParaRPr/>
           </a:p>
         </p:txBody>
       </p:sp>
@@ -6530,7 +6579,7 @@
           </a:fontRef>
         </p:style>
         <p:txBody>
-          <a:bodyPr rtlCol="0" anchor="ctr" wrap="square" lIns="109728" rIns="109728" tIns="54864" bIns="54864"/>
+          <a:bodyPr wrap="square" lIns="109728" tIns="54864" rIns="109728" bIns="54864" rtlCol="0" anchor="ctr"/>
           <a:lstStyle/>
           <a:p>
             <a:pPr algn="ctr">
@@ -6570,7 +6619,7 @@
           <a:noFill/>
         </p:spPr>
         <p:txBody>
-          <a:bodyPr wrap="square" anchor="ctr" lIns="109728" rIns="109728" tIns="54864" bIns="54864">
+          <a:bodyPr wrap="square" lIns="109728" tIns="54864" rIns="109728" bIns="54864" anchor="ctr">
             <a:spAutoFit/>
           </a:bodyPr>
           <a:lstStyle/>
@@ -6640,6 +6689,7 @@
           <a:lstStyle/>
           <a:p>
             <a:pPr algn="ctr"/>
+            <a:endParaRPr/>
           </a:p>
         </p:txBody>
       </p:sp>
@@ -6680,7 +6730,7 @@
           </a:fontRef>
         </p:style>
         <p:txBody>
-          <a:bodyPr rtlCol="0" anchor="ctr" wrap="square" lIns="109728" rIns="109728" tIns="54864" bIns="54864"/>
+          <a:bodyPr wrap="square" lIns="109728" tIns="54864" rIns="109728" bIns="54864" rtlCol="0" anchor="ctr"/>
           <a:lstStyle/>
           <a:p>
             <a:pPr algn="ctr">
@@ -6720,7 +6770,7 @@
           <a:noFill/>
         </p:spPr>
         <p:txBody>
-          <a:bodyPr wrap="square" anchor="ctr" lIns="109728" rIns="109728" tIns="54864" bIns="54864">
+          <a:bodyPr wrap="square" lIns="109728" tIns="54864" rIns="109728" bIns="54864" anchor="ctr">
             <a:spAutoFit/>
           </a:bodyPr>
           <a:lstStyle/>
@@ -6790,6 +6840,7 @@
           <a:lstStyle/>
           <a:p>
             <a:pPr algn="ctr"/>
+            <a:endParaRPr/>
           </a:p>
         </p:txBody>
       </p:sp>
@@ -6830,7 +6881,7 @@
           </a:fontRef>
         </p:style>
         <p:txBody>
-          <a:bodyPr rtlCol="0" anchor="ctr" wrap="square" lIns="109728" rIns="109728" tIns="54864" bIns="54864"/>
+          <a:bodyPr wrap="square" lIns="109728" tIns="54864" rIns="109728" bIns="54864" rtlCol="0" anchor="ctr"/>
           <a:lstStyle/>
           <a:p>
             <a:pPr algn="ctr">
@@ -6870,7 +6921,7 @@
           <a:noFill/>
         </p:spPr>
         <p:txBody>
-          <a:bodyPr wrap="square" anchor="ctr" lIns="109728" rIns="109728" tIns="54864" bIns="54864">
+          <a:bodyPr wrap="square" lIns="109728" tIns="54864" rIns="109728" bIns="54864" anchor="ctr">
             <a:spAutoFit/>
           </a:bodyPr>
           <a:lstStyle/>
@@ -6904,7 +6955,7 @@
 </file>
 
 <file path=ppt/slides/slide13.xml><?xml version="1.0" encoding="utf-8"?>
-<p:sld xmlns:a="http://schemas.openxmlformats.org/drawingml/2006/main" xmlns:p="http://schemas.openxmlformats.org/presentationml/2006/main" xmlns:r="http://schemas.openxmlformats.org/officeDocument/2006/relationships">
+<p:sld xmlns:a="http://schemas.openxmlformats.org/drawingml/2006/main" xmlns:r="http://schemas.openxmlformats.org/officeDocument/2006/relationships" xmlns:p="http://schemas.openxmlformats.org/presentationml/2006/main">
   <p:cSld>
     <p:spTree>
       <p:nvGrpSpPr>
@@ -6912,7 +6963,14 @@
         <p:cNvGrpSpPr/>
         <p:nvPr/>
       </p:nvGrpSpPr>
-      <p:grpSpPr/>
+      <p:grpSpPr>
+        <a:xfrm>
+          <a:off x="0" y="0"/>
+          <a:ext cx="0" cy="0"/>
+          <a:chOff x="0" y="0"/>
+          <a:chExt cx="0" cy="0"/>
+        </a:xfrm>
+      </p:grpSpPr>
       <p:sp>
         <p:nvSpPr>
           <p:cNvPr id="2" name="Rectangle 1"/>
@@ -6954,6 +7012,7 @@
           <a:lstStyle/>
           <a:p>
             <a:pPr algn="ctr"/>
+            <a:endParaRPr/>
           </a:p>
         </p:txBody>
       </p:sp>
@@ -6998,6 +7057,7 @@
           <a:lstStyle/>
           <a:p>
             <a:pPr algn="ctr"/>
+            <a:endParaRPr/>
           </a:p>
         </p:txBody>
       </p:sp>
@@ -7042,6 +7102,7 @@
           <a:lstStyle/>
           <a:p>
             <a:pPr algn="ctr"/>
+            <a:endParaRPr/>
           </a:p>
         </p:txBody>
       </p:sp>
@@ -7062,7 +7123,7 @@
           <a:noFill/>
         </p:spPr>
         <p:txBody>
-          <a:bodyPr wrap="square" anchor="t" lIns="109728" rIns="109728" tIns="54864" bIns="54864">
+          <a:bodyPr wrap="square" lIns="109728" tIns="54864" rIns="109728" bIns="54864" anchor="t">
             <a:spAutoFit/>
           </a:bodyPr>
           <a:lstStyle/>
@@ -7104,7 +7165,7 @@
           <a:noFill/>
         </p:spPr>
         <p:txBody>
-          <a:bodyPr wrap="square" anchor="t" lIns="109728" rIns="109728" tIns="54864" bIns="54864">
+          <a:bodyPr wrap="square" lIns="109728" tIns="54864" rIns="109728" bIns="54864" anchor="t">
             <a:spAutoFit/>
           </a:bodyPr>
           <a:lstStyle/>
@@ -7168,7 +7229,7 @@
           </a:fontRef>
         </p:style>
         <p:txBody>
-          <a:bodyPr rtlCol="0" anchor="ctr" wrap="square" lIns="109728" rIns="109728" tIns="54864" bIns="54864"/>
+          <a:bodyPr wrap="square" lIns="109728" tIns="54864" rIns="109728" bIns="54864" rtlCol="0" anchor="ctr"/>
           <a:lstStyle/>
           <a:p>
             <a:pPr algn="ctr">
@@ -7200,7 +7261,7 @@
 </file>
 
 <file path=ppt/slides/slide2.xml><?xml version="1.0" encoding="utf-8"?>
-<p:sld xmlns:a="http://schemas.openxmlformats.org/drawingml/2006/main" xmlns:p="http://schemas.openxmlformats.org/presentationml/2006/main" xmlns:r="http://schemas.openxmlformats.org/officeDocument/2006/relationships">
+<p:sld xmlns:a="http://schemas.openxmlformats.org/drawingml/2006/main" xmlns:r="http://schemas.openxmlformats.org/officeDocument/2006/relationships" xmlns:p="http://schemas.openxmlformats.org/presentationml/2006/main">
   <p:cSld>
     <p:spTree>
       <p:nvGrpSpPr>
@@ -7208,7 +7269,14 @@
         <p:cNvGrpSpPr/>
         <p:nvPr/>
       </p:nvGrpSpPr>
-      <p:grpSpPr/>
+      <p:grpSpPr>
+        <a:xfrm>
+          <a:off x="0" y="0"/>
+          <a:ext cx="0" cy="0"/>
+          <a:chOff x="0" y="0"/>
+          <a:chExt cx="0" cy="0"/>
+        </a:xfrm>
+      </p:grpSpPr>
       <p:sp>
         <p:nvSpPr>
           <p:cNvPr id="2" name="Rectangle 1"/>
@@ -7250,6 +7318,7 @@
           <a:lstStyle/>
           <a:p>
             <a:pPr algn="ctr"/>
+            <a:endParaRPr/>
           </a:p>
         </p:txBody>
       </p:sp>
@@ -7294,6 +7363,7 @@
           <a:lstStyle/>
           <a:p>
             <a:pPr algn="ctr"/>
+            <a:endParaRPr/>
           </a:p>
         </p:txBody>
       </p:sp>
@@ -7314,7 +7384,7 @@
           <a:noFill/>
         </p:spPr>
         <p:txBody>
-          <a:bodyPr wrap="square" anchor="t" lIns="109728" rIns="109728" tIns="54864" bIns="54864">
+          <a:bodyPr wrap="square" lIns="109728" tIns="54864" rIns="109728" bIns="54864" anchor="t">
             <a:spAutoFit/>
           </a:bodyPr>
           <a:lstStyle/>
@@ -7356,7 +7426,7 @@
           <a:noFill/>
         </p:spPr>
         <p:txBody>
-          <a:bodyPr wrap="square" anchor="ctr" lIns="109728" rIns="109728" tIns="54864" bIns="54864">
+          <a:bodyPr wrap="square" lIns="109728" tIns="54864" rIns="109728" bIns="54864" anchor="ctr">
             <a:spAutoFit/>
           </a:bodyPr>
           <a:lstStyle/>
@@ -7422,6 +7492,7 @@
           <a:lstStyle/>
           <a:p>
             <a:pPr algn="ctr"/>
+            <a:endParaRPr/>
           </a:p>
         </p:txBody>
       </p:sp>
@@ -7442,7 +7513,7 @@
           <a:noFill/>
         </p:spPr>
         <p:txBody>
-          <a:bodyPr wrap="square" anchor="ctr" lIns="109728" rIns="109728" tIns="54864" bIns="54864">
+          <a:bodyPr wrap="square" lIns="109728" tIns="54864" rIns="109728" bIns="54864" anchor="ctr">
             <a:spAutoFit/>
           </a:bodyPr>
           <a:lstStyle/>
@@ -7484,7 +7555,7 @@
           <a:noFill/>
         </p:spPr>
         <p:txBody>
-          <a:bodyPr wrap="square" anchor="ctr" lIns="109728" rIns="109728" tIns="54864" bIns="54864">
+          <a:bodyPr wrap="square" lIns="109728" tIns="54864" rIns="109728" bIns="54864" anchor="ctr">
             <a:spAutoFit/>
           </a:bodyPr>
           <a:lstStyle/>
@@ -7532,13 +7603,6 @@
             <a:noFill/>
           </a:ln>
           <a:effectLst/>
-          <a:effectLst>
-            <a:outerShdw blurRad="60000" dist="25000" dir="5400000" rotWithShape="0">
-              <a:srgbClr val="1A1A2E">
-                <a:alpha val="22000"/>
-              </a:srgbClr>
-            </a:outerShdw>
-          </a:effectLst>
         </p:spPr>
         <p:style>
           <a:lnRef idx="1">
@@ -7559,6 +7623,7 @@
           <a:lstStyle/>
           <a:p>
             <a:pPr algn="ctr"/>
+            <a:endParaRPr/>
           </a:p>
         </p:txBody>
       </p:sp>
@@ -7579,7 +7644,7 @@
           <a:noFill/>
         </p:spPr>
         <p:txBody>
-          <a:bodyPr wrap="square" anchor="ctr" lIns="109728" rIns="109728" tIns="54864" bIns="54864">
+          <a:bodyPr wrap="square" lIns="109728" tIns="54864" rIns="109728" bIns="54864" anchor="ctr">
             <a:spAutoFit/>
           </a:bodyPr>
           <a:lstStyle/>
@@ -7621,7 +7686,7 @@
           <a:noFill/>
         </p:spPr>
         <p:txBody>
-          <a:bodyPr wrap="square" anchor="ctr" lIns="109728" rIns="109728" tIns="54864" bIns="54864">
+          <a:bodyPr wrap="square" lIns="109728" tIns="54864" rIns="109728" bIns="54864" anchor="ctr">
             <a:spAutoFit/>
           </a:bodyPr>
           <a:lstStyle/>
@@ -7669,13 +7734,6 @@
             <a:noFill/>
           </a:ln>
           <a:effectLst/>
-          <a:effectLst>
-            <a:outerShdw blurRad="60000" dist="25000" dir="5400000" rotWithShape="0">
-              <a:srgbClr val="1A1A2E">
-                <a:alpha val="22000"/>
-              </a:srgbClr>
-            </a:outerShdw>
-          </a:effectLst>
         </p:spPr>
         <p:style>
           <a:lnRef idx="1">
@@ -7696,6 +7754,7 @@
           <a:lstStyle/>
           <a:p>
             <a:pPr algn="ctr"/>
+            <a:endParaRPr/>
           </a:p>
         </p:txBody>
       </p:sp>
@@ -7716,7 +7775,7 @@
           <a:noFill/>
         </p:spPr>
         <p:txBody>
-          <a:bodyPr wrap="square" anchor="ctr" lIns="109728" rIns="109728" tIns="54864" bIns="54864">
+          <a:bodyPr wrap="square" lIns="109728" tIns="54864" rIns="109728" bIns="54864" anchor="ctr">
             <a:spAutoFit/>
           </a:bodyPr>
           <a:lstStyle/>
@@ -7758,7 +7817,7 @@
           <a:noFill/>
         </p:spPr>
         <p:txBody>
-          <a:bodyPr wrap="square" anchor="ctr" lIns="109728" rIns="109728" tIns="54864" bIns="54864">
+          <a:bodyPr wrap="square" lIns="109728" tIns="54864" rIns="109728" bIns="54864" anchor="ctr">
             <a:spAutoFit/>
           </a:bodyPr>
           <a:lstStyle/>
@@ -7806,13 +7865,6 @@
             <a:noFill/>
           </a:ln>
           <a:effectLst/>
-          <a:effectLst>
-            <a:outerShdw blurRad="60000" dist="25000" dir="5400000" rotWithShape="0">
-              <a:srgbClr val="1A1A2E">
-                <a:alpha val="22000"/>
-              </a:srgbClr>
-            </a:outerShdw>
-          </a:effectLst>
         </p:spPr>
         <p:style>
           <a:lnRef idx="1">
@@ -7833,6 +7885,7 @@
           <a:lstStyle/>
           <a:p>
             <a:pPr algn="ctr"/>
+            <a:endParaRPr/>
           </a:p>
         </p:txBody>
       </p:sp>
@@ -7853,7 +7906,7 @@
           <a:noFill/>
         </p:spPr>
         <p:txBody>
-          <a:bodyPr wrap="square" anchor="ctr" lIns="109728" rIns="109728" tIns="54864" bIns="54864">
+          <a:bodyPr wrap="square" lIns="109728" tIns="54864" rIns="109728" bIns="54864" anchor="ctr">
             <a:spAutoFit/>
           </a:bodyPr>
           <a:lstStyle/>
@@ -7895,7 +7948,7 @@
           <a:noFill/>
         </p:spPr>
         <p:txBody>
-          <a:bodyPr wrap="square" anchor="ctr" lIns="109728" rIns="109728" tIns="54864" bIns="54864">
+          <a:bodyPr wrap="square" lIns="109728" tIns="54864" rIns="109728" bIns="54864" anchor="ctr">
             <a:spAutoFit/>
           </a:bodyPr>
           <a:lstStyle/>
@@ -7937,7 +7990,7 @@
           <a:noFill/>
         </p:spPr>
         <p:txBody>
-          <a:bodyPr wrap="square" anchor="t" lIns="109728" rIns="109728" tIns="54864" bIns="54864">
+          <a:bodyPr wrap="square" lIns="109728" tIns="54864" rIns="109728" bIns="54864" anchor="t">
             <a:spAutoFit/>
           </a:bodyPr>
           <a:lstStyle/>
@@ -8005,6 +8058,7 @@
           <a:lstStyle/>
           <a:p>
             <a:pPr algn="ctr"/>
+            <a:endParaRPr/>
           </a:p>
         </p:txBody>
       </p:sp>
@@ -8047,7 +8101,7 @@
           </a:fontRef>
         </p:style>
         <p:txBody>
-          <a:bodyPr rtlCol="0" anchor="ctr" wrap="square" lIns="109728" rIns="109728" tIns="54864" bIns="54864"/>
+          <a:bodyPr wrap="square" lIns="109728" tIns="54864" rIns="109728" bIns="54864" rtlCol="0" anchor="ctr"/>
           <a:lstStyle/>
           <a:p>
             <a:pPr algn="ctr">
@@ -8087,7 +8141,7 @@
           <a:noFill/>
         </p:spPr>
         <p:txBody>
-          <a:bodyPr wrap="square" anchor="ctr" lIns="109728" rIns="109728" tIns="54864" bIns="54864">
+          <a:bodyPr wrap="square" lIns="109728" tIns="54864" rIns="109728" bIns="54864" anchor="ctr">
             <a:spAutoFit/>
           </a:bodyPr>
           <a:lstStyle/>
@@ -8155,6 +8209,7 @@
           <a:lstStyle/>
           <a:p>
             <a:pPr algn="ctr"/>
+            <a:endParaRPr/>
           </a:p>
         </p:txBody>
       </p:sp>
@@ -8197,7 +8252,7 @@
           </a:fontRef>
         </p:style>
         <p:txBody>
-          <a:bodyPr rtlCol="0" anchor="ctr" wrap="square" lIns="109728" rIns="109728" tIns="54864" bIns="54864"/>
+          <a:bodyPr wrap="square" lIns="109728" tIns="54864" rIns="109728" bIns="54864" rtlCol="0" anchor="ctr"/>
           <a:lstStyle/>
           <a:p>
             <a:pPr algn="ctr">
@@ -8237,7 +8292,7 @@
           <a:noFill/>
         </p:spPr>
         <p:txBody>
-          <a:bodyPr wrap="square" anchor="ctr" lIns="109728" rIns="109728" tIns="54864" bIns="54864">
+          <a:bodyPr wrap="square" lIns="109728" tIns="54864" rIns="109728" bIns="54864" anchor="ctr">
             <a:spAutoFit/>
           </a:bodyPr>
           <a:lstStyle/>
@@ -8305,6 +8360,7 @@
           <a:lstStyle/>
           <a:p>
             <a:pPr algn="ctr"/>
+            <a:endParaRPr/>
           </a:p>
         </p:txBody>
       </p:sp>
@@ -8347,7 +8403,7 @@
           </a:fontRef>
         </p:style>
         <p:txBody>
-          <a:bodyPr rtlCol="0" anchor="ctr" wrap="square" lIns="109728" rIns="109728" tIns="54864" bIns="54864"/>
+          <a:bodyPr wrap="square" lIns="109728" tIns="54864" rIns="109728" bIns="54864" rtlCol="0" anchor="ctr"/>
           <a:lstStyle/>
           <a:p>
             <a:pPr algn="ctr">
@@ -8387,7 +8443,7 @@
           <a:noFill/>
         </p:spPr>
         <p:txBody>
-          <a:bodyPr wrap="square" anchor="ctr" lIns="109728" rIns="109728" tIns="54864" bIns="54864">
+          <a:bodyPr wrap="square" lIns="109728" tIns="54864" rIns="109728" bIns="54864" anchor="ctr">
             <a:spAutoFit/>
           </a:bodyPr>
           <a:lstStyle/>
@@ -8455,6 +8511,7 @@
           <a:lstStyle/>
           <a:p>
             <a:pPr algn="ctr"/>
+            <a:endParaRPr/>
           </a:p>
         </p:txBody>
       </p:sp>
@@ -8497,7 +8554,7 @@
           </a:fontRef>
         </p:style>
         <p:txBody>
-          <a:bodyPr rtlCol="0" anchor="ctr" wrap="square" lIns="109728" rIns="109728" tIns="54864" bIns="54864"/>
+          <a:bodyPr wrap="square" lIns="109728" tIns="54864" rIns="109728" bIns="54864" rtlCol="0" anchor="ctr"/>
           <a:lstStyle/>
           <a:p>
             <a:pPr algn="ctr">
@@ -8537,7 +8594,7 @@
           <a:noFill/>
         </p:spPr>
         <p:txBody>
-          <a:bodyPr wrap="square" anchor="ctr" lIns="109728" rIns="109728" tIns="54864" bIns="54864">
+          <a:bodyPr wrap="square" lIns="109728" tIns="54864" rIns="109728" bIns="54864" anchor="ctr">
             <a:spAutoFit/>
           </a:bodyPr>
           <a:lstStyle/>
@@ -8571,7 +8628,7 @@
 </file>
 
 <file path=ppt/slides/slide3.xml><?xml version="1.0" encoding="utf-8"?>
-<p:sld xmlns:a="http://schemas.openxmlformats.org/drawingml/2006/main" xmlns:p="http://schemas.openxmlformats.org/presentationml/2006/main" xmlns:r="http://schemas.openxmlformats.org/officeDocument/2006/relationships">
+<p:sld xmlns:a="http://schemas.openxmlformats.org/drawingml/2006/main" xmlns:r="http://schemas.openxmlformats.org/officeDocument/2006/relationships" xmlns:p="http://schemas.openxmlformats.org/presentationml/2006/main">
   <p:cSld>
     <p:spTree>
       <p:nvGrpSpPr>
@@ -8579,7 +8636,14 @@
         <p:cNvGrpSpPr/>
         <p:nvPr/>
       </p:nvGrpSpPr>
-      <p:grpSpPr/>
+      <p:grpSpPr>
+        <a:xfrm>
+          <a:off x="0" y="0"/>
+          <a:ext cx="0" cy="0"/>
+          <a:chOff x="0" y="0"/>
+          <a:chExt cx="0" cy="0"/>
+        </a:xfrm>
+      </p:grpSpPr>
       <p:sp>
         <p:nvSpPr>
           <p:cNvPr id="2" name="Rectangle 1"/>
@@ -8621,6 +8685,7 @@
           <a:lstStyle/>
           <a:p>
             <a:pPr algn="ctr"/>
+            <a:endParaRPr/>
           </a:p>
         </p:txBody>
       </p:sp>
@@ -8665,6 +8730,7 @@
           <a:lstStyle/>
           <a:p>
             <a:pPr algn="ctr"/>
+            <a:endParaRPr/>
           </a:p>
         </p:txBody>
       </p:sp>
@@ -8685,7 +8751,7 @@
           <a:noFill/>
         </p:spPr>
         <p:txBody>
-          <a:bodyPr wrap="square" anchor="t" lIns="109728" rIns="109728" tIns="54864" bIns="54864">
+          <a:bodyPr wrap="square" lIns="109728" tIns="54864" rIns="109728" bIns="54864" anchor="t">
             <a:spAutoFit/>
           </a:bodyPr>
           <a:lstStyle/>
@@ -8727,7 +8793,7 @@
           <a:noFill/>
         </p:spPr>
         <p:txBody>
-          <a:bodyPr wrap="square" anchor="ctr" lIns="109728" rIns="109728" tIns="54864" bIns="54864">
+          <a:bodyPr wrap="square" lIns="109728" tIns="54864" rIns="109728" bIns="54864" anchor="ctr">
             <a:spAutoFit/>
           </a:bodyPr>
           <a:lstStyle/>
@@ -8793,6 +8859,7 @@
           <a:lstStyle/>
           <a:p>
             <a:pPr algn="ctr"/>
+            <a:endParaRPr/>
           </a:p>
         </p:txBody>
       </p:sp>
@@ -8813,7 +8880,7 @@
           <a:noFill/>
         </p:spPr>
         <p:txBody>
-          <a:bodyPr wrap="square" anchor="ctr" lIns="109728" rIns="109728" tIns="54864" bIns="54864">
+          <a:bodyPr wrap="square" lIns="109728" tIns="54864" rIns="109728" bIns="54864" anchor="ctr">
             <a:spAutoFit/>
           </a:bodyPr>
           <a:lstStyle/>
@@ -8855,7 +8922,7 @@
           <a:noFill/>
         </p:spPr>
         <p:txBody>
-          <a:bodyPr wrap="square" anchor="ctr" lIns="109728" rIns="109728" tIns="54864" bIns="54864">
+          <a:bodyPr wrap="square" lIns="109728" tIns="54864" rIns="109728" bIns="54864" anchor="ctr">
             <a:spAutoFit/>
           </a:bodyPr>
           <a:lstStyle/>
@@ -8925,6 +8992,7 @@
           <a:lstStyle/>
           <a:p>
             <a:pPr algn="ctr"/>
+            <a:endParaRPr/>
           </a:p>
         </p:txBody>
       </p:sp>
@@ -8945,7 +9013,7 @@
           <a:noFill/>
         </p:spPr>
         <p:txBody>
-          <a:bodyPr wrap="square" anchor="ctr" lIns="109728" rIns="109728" tIns="54864" bIns="54864">
+          <a:bodyPr wrap="square" lIns="109728" tIns="54864" rIns="109728" bIns="54864" anchor="ctr">
             <a:spAutoFit/>
           </a:bodyPr>
           <a:lstStyle/>
@@ -8987,7 +9055,7 @@
           <a:noFill/>
         </p:spPr>
         <p:txBody>
-          <a:bodyPr wrap="square" anchor="ctr" lIns="109728" rIns="109728" tIns="54864" bIns="54864">
+          <a:bodyPr wrap="square" lIns="109728" tIns="54864" rIns="109728" bIns="54864" anchor="ctr">
             <a:spAutoFit/>
           </a:bodyPr>
           <a:lstStyle/>
@@ -9057,6 +9125,7 @@
           <a:lstStyle/>
           <a:p>
             <a:pPr algn="ctr"/>
+            <a:endParaRPr/>
           </a:p>
         </p:txBody>
       </p:sp>
@@ -9077,7 +9146,7 @@
           <a:noFill/>
         </p:spPr>
         <p:txBody>
-          <a:bodyPr wrap="square" anchor="ctr" lIns="109728" rIns="109728" tIns="54864" bIns="54864">
+          <a:bodyPr wrap="square" lIns="109728" tIns="54864" rIns="109728" bIns="54864" anchor="ctr">
             <a:spAutoFit/>
           </a:bodyPr>
           <a:lstStyle/>
@@ -9119,7 +9188,7 @@
           <a:noFill/>
         </p:spPr>
         <p:txBody>
-          <a:bodyPr wrap="square" anchor="ctr" lIns="109728" rIns="109728" tIns="54864" bIns="54864">
+          <a:bodyPr wrap="square" lIns="109728" tIns="54864" rIns="109728" bIns="54864" anchor="ctr">
             <a:spAutoFit/>
           </a:bodyPr>
           <a:lstStyle/>
@@ -9169,13 +9238,6 @@
             </a:solidFill>
           </a:ln>
           <a:effectLst/>
-          <a:effectLst>
-            <a:outerShdw blurRad="60000" dist="25000" dir="5400000" rotWithShape="0">
-              <a:srgbClr val="1A1A2E">
-                <a:alpha val="22000"/>
-              </a:srgbClr>
-            </a:outerShdw>
-          </a:effectLst>
         </p:spPr>
         <p:style>
           <a:lnRef idx="1">
@@ -9196,6 +9258,7 @@
           <a:lstStyle/>
           <a:p>
             <a:pPr algn="ctr"/>
+            <a:endParaRPr/>
           </a:p>
         </p:txBody>
       </p:sp>
@@ -9216,7 +9279,7 @@
           <a:noFill/>
         </p:spPr>
         <p:txBody>
-          <a:bodyPr wrap="square" anchor="ctr" lIns="109728" rIns="109728" tIns="54864" bIns="54864">
+          <a:bodyPr wrap="square" lIns="109728" tIns="54864" rIns="109728" bIns="54864" anchor="ctr">
             <a:spAutoFit/>
           </a:bodyPr>
           <a:lstStyle/>
@@ -9258,7 +9321,7 @@
           <a:noFill/>
         </p:spPr>
         <p:txBody>
-          <a:bodyPr wrap="square" anchor="ctr" lIns="109728" rIns="109728" tIns="54864" bIns="54864">
+          <a:bodyPr wrap="square" lIns="109728" tIns="54864" rIns="109728" bIns="54864" anchor="ctr">
             <a:spAutoFit/>
           </a:bodyPr>
           <a:lstStyle/>
@@ -9328,6 +9391,7 @@
           <a:lstStyle/>
           <a:p>
             <a:pPr algn="ctr"/>
+            <a:endParaRPr/>
           </a:p>
         </p:txBody>
       </p:sp>
@@ -9348,7 +9412,7 @@
           <a:noFill/>
         </p:spPr>
         <p:txBody>
-          <a:bodyPr wrap="square" anchor="ctr" lIns="109728" rIns="109728" tIns="54864" bIns="54864">
+          <a:bodyPr wrap="square" lIns="109728" tIns="54864" rIns="109728" bIns="54864" anchor="ctr">
             <a:spAutoFit/>
           </a:bodyPr>
           <a:lstStyle/>
@@ -9390,7 +9454,7 @@
           <a:noFill/>
         </p:spPr>
         <p:txBody>
-          <a:bodyPr wrap="square" anchor="ctr" lIns="109728" rIns="109728" tIns="54864" bIns="54864">
+          <a:bodyPr wrap="square" lIns="109728" tIns="54864" rIns="109728" bIns="54864" anchor="ctr">
             <a:spAutoFit/>
           </a:bodyPr>
           <a:lstStyle/>
@@ -9460,6 +9524,7 @@
           <a:lstStyle/>
           <a:p>
             <a:pPr algn="ctr"/>
+            <a:endParaRPr/>
           </a:p>
         </p:txBody>
       </p:sp>
@@ -9480,7 +9545,7 @@
           <a:noFill/>
         </p:spPr>
         <p:txBody>
-          <a:bodyPr wrap="square" anchor="ctr" lIns="109728" rIns="109728" tIns="54864" bIns="54864">
+          <a:bodyPr wrap="square" lIns="109728" tIns="54864" rIns="109728" bIns="54864" anchor="ctr">
             <a:spAutoFit/>
           </a:bodyPr>
           <a:lstStyle/>
@@ -9522,7 +9587,7 @@
           <a:noFill/>
         </p:spPr>
         <p:txBody>
-          <a:bodyPr wrap="square" anchor="ctr" lIns="109728" rIns="109728" tIns="54864" bIns="54864">
+          <a:bodyPr wrap="square" lIns="109728" tIns="54864" rIns="109728" bIns="54864" anchor="ctr">
             <a:spAutoFit/>
           </a:bodyPr>
           <a:lstStyle/>
@@ -9564,7 +9629,7 @@
           <a:noFill/>
         </p:spPr>
         <p:txBody>
-          <a:bodyPr wrap="square" anchor="t" lIns="109728" rIns="109728" tIns="54864" bIns="54864">
+          <a:bodyPr wrap="square" lIns="109728" tIns="54864" rIns="109728" bIns="54864" anchor="t">
             <a:spAutoFit/>
           </a:bodyPr>
           <a:lstStyle/>
@@ -9598,7 +9663,7 @@
 </file>
 
 <file path=ppt/slides/slide4.xml><?xml version="1.0" encoding="utf-8"?>
-<p:sld xmlns:a="http://schemas.openxmlformats.org/drawingml/2006/main" xmlns:p="http://schemas.openxmlformats.org/presentationml/2006/main" xmlns:r="http://schemas.openxmlformats.org/officeDocument/2006/relationships">
+<p:sld xmlns:a="http://schemas.openxmlformats.org/drawingml/2006/main" xmlns:r="http://schemas.openxmlformats.org/officeDocument/2006/relationships" xmlns:p="http://schemas.openxmlformats.org/presentationml/2006/main">
   <p:cSld>
     <p:spTree>
       <p:nvGrpSpPr>
@@ -9606,7 +9671,14 @@
         <p:cNvGrpSpPr/>
         <p:nvPr/>
       </p:nvGrpSpPr>
-      <p:grpSpPr/>
+      <p:grpSpPr>
+        <a:xfrm>
+          <a:off x="0" y="0"/>
+          <a:ext cx="0" cy="0"/>
+          <a:chOff x="0" y="0"/>
+          <a:chExt cx="0" cy="0"/>
+        </a:xfrm>
+      </p:grpSpPr>
       <p:sp>
         <p:nvSpPr>
           <p:cNvPr id="2" name="Rectangle 1"/>
@@ -9648,6 +9720,7 @@
           <a:lstStyle/>
           <a:p>
             <a:pPr algn="ctr"/>
+            <a:endParaRPr/>
           </a:p>
         </p:txBody>
       </p:sp>
@@ -9692,6 +9765,7 @@
           <a:lstStyle/>
           <a:p>
             <a:pPr algn="ctr"/>
+            <a:endParaRPr/>
           </a:p>
         </p:txBody>
       </p:sp>
@@ -9712,7 +9786,7 @@
           <a:noFill/>
         </p:spPr>
         <p:txBody>
-          <a:bodyPr wrap="square" anchor="t" lIns="109728" rIns="109728" tIns="54864" bIns="54864">
+          <a:bodyPr wrap="square" lIns="109728" tIns="54864" rIns="109728" bIns="54864" anchor="t">
             <a:spAutoFit/>
           </a:bodyPr>
           <a:lstStyle/>
@@ -9754,7 +9828,7 @@
           <a:noFill/>
         </p:spPr>
         <p:txBody>
-          <a:bodyPr wrap="square" anchor="ctr" lIns="109728" rIns="109728" tIns="54864" bIns="54864">
+          <a:bodyPr wrap="square" lIns="109728" tIns="54864" rIns="109728" bIns="54864" anchor="ctr">
             <a:spAutoFit/>
           </a:bodyPr>
           <a:lstStyle/>
@@ -9820,6 +9894,7 @@
           <a:lstStyle/>
           <a:p>
             <a:pPr algn="ctr"/>
+            <a:endParaRPr/>
           </a:p>
         </p:txBody>
       </p:sp>
@@ -9840,7 +9915,7 @@
           <a:noFill/>
         </p:spPr>
         <p:txBody>
-          <a:bodyPr wrap="square" anchor="ctr" lIns="109728" rIns="109728" tIns="54864" bIns="54864">
+          <a:bodyPr wrap="square" lIns="109728" tIns="54864" rIns="109728" bIns="54864" anchor="ctr">
             <a:spAutoFit/>
           </a:bodyPr>
           <a:lstStyle/>
@@ -9882,7 +9957,7 @@
           <a:noFill/>
         </p:spPr>
         <p:txBody>
-          <a:bodyPr wrap="square" anchor="ctr" lIns="109728" rIns="109728" tIns="54864" bIns="54864">
+          <a:bodyPr wrap="square" lIns="109728" tIns="54864" rIns="109728" bIns="54864" anchor="ctr">
             <a:spAutoFit/>
           </a:bodyPr>
           <a:lstStyle/>
@@ -9932,13 +10007,6 @@
             </a:solidFill>
           </a:ln>
           <a:effectLst/>
-          <a:effectLst>
-            <a:outerShdw blurRad="60000" dist="25000" dir="5400000" rotWithShape="0">
-              <a:srgbClr val="1A1A2E">
-                <a:alpha val="22000"/>
-              </a:srgbClr>
-            </a:outerShdw>
-          </a:effectLst>
         </p:spPr>
         <p:style>
           <a:lnRef idx="1">
@@ -9959,6 +10027,7 @@
           <a:lstStyle/>
           <a:p>
             <a:pPr algn="ctr"/>
+            <a:endParaRPr/>
           </a:p>
         </p:txBody>
       </p:sp>
@@ -10003,6 +10072,7 @@
           <a:lstStyle/>
           <a:p>
             <a:pPr algn="ctr"/>
+            <a:endParaRPr/>
           </a:p>
         </p:txBody>
       </p:sp>
@@ -10023,7 +10093,7 @@
           <a:noFill/>
         </p:spPr>
         <p:txBody>
-          <a:bodyPr wrap="square" anchor="t" lIns="109728" rIns="109728" tIns="54864" bIns="54864">
+          <a:bodyPr wrap="square" lIns="109728" tIns="54864" rIns="109728" bIns="54864" anchor="t">
             <a:spAutoFit/>
           </a:bodyPr>
           <a:lstStyle/>
@@ -10092,13 +10162,6 @@
             </a:solidFill>
           </a:ln>
           <a:effectLst/>
-          <a:effectLst>
-            <a:outerShdw blurRad="60000" dist="25000" dir="5400000" rotWithShape="0">
-              <a:srgbClr val="1A1A2E">
-                <a:alpha val="22000"/>
-              </a:srgbClr>
-            </a:outerShdw>
-          </a:effectLst>
         </p:spPr>
         <p:style>
           <a:lnRef idx="1">
@@ -10119,6 +10182,7 @@
           <a:lstStyle/>
           <a:p>
             <a:pPr algn="ctr"/>
+            <a:endParaRPr/>
           </a:p>
         </p:txBody>
       </p:sp>
@@ -10163,6 +10227,7 @@
           <a:lstStyle/>
           <a:p>
             <a:pPr algn="ctr"/>
+            <a:endParaRPr/>
           </a:p>
         </p:txBody>
       </p:sp>
@@ -10183,7 +10248,7 @@
           <a:noFill/>
         </p:spPr>
         <p:txBody>
-          <a:bodyPr wrap="square" anchor="t" lIns="109728" rIns="109728" tIns="54864" bIns="54864">
+          <a:bodyPr wrap="square" lIns="109728" tIns="54864" rIns="109728" bIns="54864" anchor="t">
             <a:spAutoFit/>
           </a:bodyPr>
           <a:lstStyle/>
@@ -10252,13 +10317,6 @@
             </a:solidFill>
           </a:ln>
           <a:effectLst/>
-          <a:effectLst>
-            <a:outerShdw blurRad="60000" dist="25000" dir="5400000" rotWithShape="0">
-              <a:srgbClr val="1A1A2E">
-                <a:alpha val="22000"/>
-              </a:srgbClr>
-            </a:outerShdw>
-          </a:effectLst>
         </p:spPr>
         <p:style>
           <a:lnRef idx="1">
@@ -10279,6 +10337,7 @@
           <a:lstStyle/>
           <a:p>
             <a:pPr algn="ctr"/>
+            <a:endParaRPr/>
           </a:p>
         </p:txBody>
       </p:sp>
@@ -10323,6 +10382,7 @@
           <a:lstStyle/>
           <a:p>
             <a:pPr algn="ctr"/>
+            <a:endParaRPr/>
           </a:p>
         </p:txBody>
       </p:sp>
@@ -10343,7 +10403,7 @@
           <a:noFill/>
         </p:spPr>
         <p:txBody>
-          <a:bodyPr wrap="square" anchor="t" lIns="109728" rIns="109728" tIns="54864" bIns="54864">
+          <a:bodyPr wrap="square" lIns="109728" tIns="54864" rIns="109728" bIns="54864" anchor="t">
             <a:spAutoFit/>
           </a:bodyPr>
           <a:lstStyle/>
@@ -10396,7 +10456,7 @@
 </file>
 
 <file path=ppt/slides/slide5.xml><?xml version="1.0" encoding="utf-8"?>
-<p:sld xmlns:a="http://schemas.openxmlformats.org/drawingml/2006/main" xmlns:p="http://schemas.openxmlformats.org/presentationml/2006/main" xmlns:r="http://schemas.openxmlformats.org/officeDocument/2006/relationships">
+<p:sld xmlns:a="http://schemas.openxmlformats.org/drawingml/2006/main" xmlns:r="http://schemas.openxmlformats.org/officeDocument/2006/relationships" xmlns:p="http://schemas.openxmlformats.org/presentationml/2006/main">
   <p:cSld>
     <p:spTree>
       <p:nvGrpSpPr>
@@ -10404,7 +10464,14 @@
         <p:cNvGrpSpPr/>
         <p:nvPr/>
       </p:nvGrpSpPr>
-      <p:grpSpPr/>
+      <p:grpSpPr>
+        <a:xfrm>
+          <a:off x="0" y="0"/>
+          <a:ext cx="0" cy="0"/>
+          <a:chOff x="0" y="0"/>
+          <a:chExt cx="0" cy="0"/>
+        </a:xfrm>
+      </p:grpSpPr>
       <p:sp>
         <p:nvSpPr>
           <p:cNvPr id="2" name="Rectangle 1"/>
@@ -10446,6 +10513,7 @@
           <a:lstStyle/>
           <a:p>
             <a:pPr algn="ctr"/>
+            <a:endParaRPr/>
           </a:p>
         </p:txBody>
       </p:sp>
@@ -10490,6 +10558,7 @@
           <a:lstStyle/>
           <a:p>
             <a:pPr algn="ctr"/>
+            <a:endParaRPr/>
           </a:p>
         </p:txBody>
       </p:sp>
@@ -10510,7 +10579,7 @@
           <a:noFill/>
         </p:spPr>
         <p:txBody>
-          <a:bodyPr wrap="square" anchor="t" lIns="109728" rIns="109728" tIns="54864" bIns="54864">
+          <a:bodyPr wrap="square" lIns="109728" tIns="54864" rIns="109728" bIns="54864" anchor="t">
             <a:spAutoFit/>
           </a:bodyPr>
           <a:lstStyle/>
@@ -10552,7 +10621,7 @@
           <a:noFill/>
         </p:spPr>
         <p:txBody>
-          <a:bodyPr wrap="square" anchor="ctr" lIns="109728" rIns="109728" tIns="54864" bIns="54864">
+          <a:bodyPr wrap="square" lIns="109728" tIns="54864" rIns="109728" bIns="54864" anchor="ctr">
             <a:spAutoFit/>
           </a:bodyPr>
           <a:lstStyle/>
@@ -10618,6 +10687,7 @@
           <a:lstStyle/>
           <a:p>
             <a:pPr algn="ctr"/>
+            <a:endParaRPr/>
           </a:p>
         </p:txBody>
       </p:sp>
@@ -10638,7 +10708,7 @@
           <a:noFill/>
         </p:spPr>
         <p:txBody>
-          <a:bodyPr wrap="square" anchor="ctr" lIns="109728" rIns="109728" tIns="54864" bIns="54864">
+          <a:bodyPr wrap="square" lIns="109728" tIns="54864" rIns="109728" bIns="54864" anchor="ctr">
             <a:spAutoFit/>
           </a:bodyPr>
           <a:lstStyle/>
@@ -10680,7 +10750,7 @@
           <a:noFill/>
         </p:spPr>
         <p:txBody>
-          <a:bodyPr wrap="square" anchor="ctr" lIns="109728" rIns="109728" tIns="54864" bIns="54864">
+          <a:bodyPr wrap="square" lIns="109728" tIns="54864" rIns="109728" bIns="54864" anchor="ctr">
             <a:spAutoFit/>
           </a:bodyPr>
           <a:lstStyle/>
@@ -10730,13 +10800,6 @@
             </a:solidFill>
           </a:ln>
           <a:effectLst/>
-          <a:effectLst>
-            <a:outerShdw blurRad="60000" dist="25000" dir="5400000" rotWithShape="0">
-              <a:srgbClr val="1A1A2E">
-                <a:alpha val="22000"/>
-              </a:srgbClr>
-            </a:outerShdw>
-          </a:effectLst>
         </p:spPr>
         <p:style>
           <a:lnRef idx="1">
@@ -10757,6 +10820,7 @@
           <a:lstStyle/>
           <a:p>
             <a:pPr algn="ctr"/>
+            <a:endParaRPr/>
           </a:p>
         </p:txBody>
       </p:sp>
@@ -10801,6 +10865,7 @@
           <a:lstStyle/>
           <a:p>
             <a:pPr algn="ctr"/>
+            <a:endParaRPr/>
           </a:p>
         </p:txBody>
       </p:sp>
@@ -10821,7 +10886,7 @@
           <a:noFill/>
         </p:spPr>
         <p:txBody>
-          <a:bodyPr wrap="square" anchor="t" lIns="109728" rIns="109728" tIns="54864" bIns="54864">
+          <a:bodyPr wrap="square" lIns="109728" tIns="54864" rIns="109728" bIns="54864" anchor="t">
             <a:spAutoFit/>
           </a:bodyPr>
           <a:lstStyle/>
@@ -10890,13 +10955,6 @@
             </a:solidFill>
           </a:ln>
           <a:effectLst/>
-          <a:effectLst>
-            <a:outerShdw blurRad="60000" dist="25000" dir="5400000" rotWithShape="0">
-              <a:srgbClr val="1A1A2E">
-                <a:alpha val="22000"/>
-              </a:srgbClr>
-            </a:outerShdw>
-          </a:effectLst>
         </p:spPr>
         <p:style>
           <a:lnRef idx="1">
@@ -10917,6 +10975,7 @@
           <a:lstStyle/>
           <a:p>
             <a:pPr algn="ctr"/>
+            <a:endParaRPr/>
           </a:p>
         </p:txBody>
       </p:sp>
@@ -10961,6 +11020,7 @@
           <a:lstStyle/>
           <a:p>
             <a:pPr algn="ctr"/>
+            <a:endParaRPr/>
           </a:p>
         </p:txBody>
       </p:sp>
@@ -10981,7 +11041,7 @@
           <a:noFill/>
         </p:spPr>
         <p:txBody>
-          <a:bodyPr wrap="square" anchor="t" lIns="109728" rIns="109728" tIns="54864" bIns="54864">
+          <a:bodyPr wrap="square" lIns="109728" tIns="54864" rIns="109728" bIns="54864" anchor="t">
             <a:spAutoFit/>
           </a:bodyPr>
           <a:lstStyle/>
@@ -11050,13 +11110,6 @@
             </a:solidFill>
           </a:ln>
           <a:effectLst/>
-          <a:effectLst>
-            <a:outerShdw blurRad="60000" dist="25000" dir="5400000" rotWithShape="0">
-              <a:srgbClr val="1A1A2E">
-                <a:alpha val="22000"/>
-              </a:srgbClr>
-            </a:outerShdw>
-          </a:effectLst>
         </p:spPr>
         <p:style>
           <a:lnRef idx="1">
@@ -11077,6 +11130,7 @@
           <a:lstStyle/>
           <a:p>
             <a:pPr algn="ctr"/>
+            <a:endParaRPr/>
           </a:p>
         </p:txBody>
       </p:sp>
@@ -11121,6 +11175,7 @@
           <a:lstStyle/>
           <a:p>
             <a:pPr algn="ctr"/>
+            <a:endParaRPr/>
           </a:p>
         </p:txBody>
       </p:sp>
@@ -11141,7 +11196,7 @@
           <a:noFill/>
         </p:spPr>
         <p:txBody>
-          <a:bodyPr wrap="square" anchor="t" lIns="109728" rIns="109728" tIns="54864" bIns="54864">
+          <a:bodyPr wrap="square" lIns="109728" tIns="54864" rIns="109728" bIns="54864" anchor="t">
             <a:spAutoFit/>
           </a:bodyPr>
           <a:lstStyle/>
@@ -11210,13 +11265,6 @@
             </a:solidFill>
           </a:ln>
           <a:effectLst/>
-          <a:effectLst>
-            <a:outerShdw blurRad="60000" dist="25000" dir="5400000" rotWithShape="0">
-              <a:srgbClr val="1A1A2E">
-                <a:alpha val="22000"/>
-              </a:srgbClr>
-            </a:outerShdw>
-          </a:effectLst>
         </p:spPr>
         <p:style>
           <a:lnRef idx="1">
@@ -11237,6 +11285,7 @@
           <a:lstStyle/>
           <a:p>
             <a:pPr algn="ctr"/>
+            <a:endParaRPr/>
           </a:p>
         </p:txBody>
       </p:sp>
@@ -11281,6 +11330,7 @@
           <a:lstStyle/>
           <a:p>
             <a:pPr algn="ctr"/>
+            <a:endParaRPr/>
           </a:p>
         </p:txBody>
       </p:sp>
@@ -11301,7 +11351,7 @@
           <a:noFill/>
         </p:spPr>
         <p:txBody>
-          <a:bodyPr wrap="square" anchor="t" lIns="109728" rIns="109728" tIns="54864" bIns="54864">
+          <a:bodyPr wrap="square" lIns="109728" tIns="54864" rIns="109728" bIns="54864" anchor="t">
             <a:spAutoFit/>
           </a:bodyPr>
           <a:lstStyle/>
@@ -11370,13 +11420,6 @@
             </a:solidFill>
           </a:ln>
           <a:effectLst/>
-          <a:effectLst>
-            <a:outerShdw blurRad="60000" dist="25000" dir="5400000" rotWithShape="0">
-              <a:srgbClr val="1A1A2E">
-                <a:alpha val="22000"/>
-              </a:srgbClr>
-            </a:outerShdw>
-          </a:effectLst>
         </p:spPr>
         <p:style>
           <a:lnRef idx="1">
@@ -11397,6 +11440,7 @@
           <a:lstStyle/>
           <a:p>
             <a:pPr algn="ctr"/>
+            <a:endParaRPr/>
           </a:p>
         </p:txBody>
       </p:sp>
@@ -11441,6 +11485,7 @@
           <a:lstStyle/>
           <a:p>
             <a:pPr algn="ctr"/>
+            <a:endParaRPr/>
           </a:p>
         </p:txBody>
       </p:sp>
@@ -11461,7 +11506,7 @@
           <a:noFill/>
         </p:spPr>
         <p:txBody>
-          <a:bodyPr wrap="square" anchor="t" lIns="109728" rIns="109728" tIns="54864" bIns="54864">
+          <a:bodyPr wrap="square" lIns="109728" tIns="54864" rIns="109728" bIns="54864" anchor="t">
             <a:spAutoFit/>
           </a:bodyPr>
           <a:lstStyle/>
@@ -11530,13 +11575,6 @@
             </a:solidFill>
           </a:ln>
           <a:effectLst/>
-          <a:effectLst>
-            <a:outerShdw blurRad="60000" dist="25000" dir="5400000" rotWithShape="0">
-              <a:srgbClr val="1A1A2E">
-                <a:alpha val="22000"/>
-              </a:srgbClr>
-            </a:outerShdw>
-          </a:effectLst>
         </p:spPr>
         <p:style>
           <a:lnRef idx="1">
@@ -11557,6 +11595,7 @@
           <a:lstStyle/>
           <a:p>
             <a:pPr algn="ctr"/>
+            <a:endParaRPr/>
           </a:p>
         </p:txBody>
       </p:sp>
@@ -11601,6 +11640,7 @@
           <a:lstStyle/>
           <a:p>
             <a:pPr algn="ctr"/>
+            <a:endParaRPr/>
           </a:p>
         </p:txBody>
       </p:sp>
@@ -11621,7 +11661,7 @@
           <a:noFill/>
         </p:spPr>
         <p:txBody>
-          <a:bodyPr wrap="square" anchor="t" lIns="109728" rIns="109728" tIns="54864" bIns="54864">
+          <a:bodyPr wrap="square" lIns="109728" tIns="54864" rIns="109728" bIns="54864" anchor="t">
             <a:spAutoFit/>
           </a:bodyPr>
           <a:lstStyle/>
@@ -11674,7 +11714,7 @@
 </file>
 
 <file path=ppt/slides/slide6.xml><?xml version="1.0" encoding="utf-8"?>
-<p:sld xmlns:a="http://schemas.openxmlformats.org/drawingml/2006/main" xmlns:p="http://schemas.openxmlformats.org/presentationml/2006/main" xmlns:r="http://schemas.openxmlformats.org/officeDocument/2006/relationships">
+<p:sld xmlns:a="http://schemas.openxmlformats.org/drawingml/2006/main" xmlns:r="http://schemas.openxmlformats.org/officeDocument/2006/relationships" xmlns:p="http://schemas.openxmlformats.org/presentationml/2006/main">
   <p:cSld>
     <p:spTree>
       <p:nvGrpSpPr>
@@ -11682,7 +11722,14 @@
         <p:cNvGrpSpPr/>
         <p:nvPr/>
       </p:nvGrpSpPr>
-      <p:grpSpPr/>
+      <p:grpSpPr>
+        <a:xfrm>
+          <a:off x="0" y="0"/>
+          <a:ext cx="0" cy="0"/>
+          <a:chOff x="0" y="0"/>
+          <a:chExt cx="0" cy="0"/>
+        </a:xfrm>
+      </p:grpSpPr>
       <p:sp>
         <p:nvSpPr>
           <p:cNvPr id="2" name="Rectangle 1"/>
@@ -11724,6 +11771,7 @@
           <a:lstStyle/>
           <a:p>
             <a:pPr algn="ctr"/>
+            <a:endParaRPr/>
           </a:p>
         </p:txBody>
       </p:sp>
@@ -11768,6 +11816,7 @@
           <a:lstStyle/>
           <a:p>
             <a:pPr algn="ctr"/>
+            <a:endParaRPr/>
           </a:p>
         </p:txBody>
       </p:sp>
@@ -11788,7 +11837,7 @@
           <a:noFill/>
         </p:spPr>
         <p:txBody>
-          <a:bodyPr wrap="square" anchor="t" lIns="109728" rIns="109728" tIns="54864" bIns="54864">
+          <a:bodyPr wrap="square" lIns="109728" tIns="54864" rIns="109728" bIns="54864" anchor="t">
             <a:spAutoFit/>
           </a:bodyPr>
           <a:lstStyle/>
@@ -11830,7 +11879,7 @@
           <a:noFill/>
         </p:spPr>
         <p:txBody>
-          <a:bodyPr wrap="square" anchor="ctr" lIns="109728" rIns="109728" tIns="54864" bIns="54864">
+          <a:bodyPr wrap="square" lIns="109728" tIns="54864" rIns="109728" bIns="54864" anchor="ctr">
             <a:spAutoFit/>
           </a:bodyPr>
           <a:lstStyle/>
@@ -11896,6 +11945,7 @@
           <a:lstStyle/>
           <a:p>
             <a:pPr algn="ctr"/>
+            <a:endParaRPr/>
           </a:p>
         </p:txBody>
       </p:sp>
@@ -11916,7 +11966,7 @@
           <a:noFill/>
         </p:spPr>
         <p:txBody>
-          <a:bodyPr wrap="square" anchor="ctr" lIns="109728" rIns="109728" tIns="54864" bIns="54864">
+          <a:bodyPr wrap="square" lIns="109728" tIns="54864" rIns="109728" bIns="54864" anchor="ctr">
             <a:spAutoFit/>
           </a:bodyPr>
           <a:lstStyle/>
@@ -11958,7 +12008,7 @@
           <a:noFill/>
         </p:spPr>
         <p:txBody>
-          <a:bodyPr wrap="square" anchor="ctr" lIns="109728" rIns="109728" tIns="54864" bIns="54864">
+          <a:bodyPr wrap="square" lIns="109728" tIns="54864" rIns="109728" bIns="54864" anchor="ctr">
             <a:spAutoFit/>
           </a:bodyPr>
           <a:lstStyle/>
@@ -12028,6 +12078,7 @@
           <a:lstStyle/>
           <a:p>
             <a:pPr algn="ctr"/>
+            <a:endParaRPr/>
           </a:p>
         </p:txBody>
       </p:sp>
@@ -12068,7 +12119,7 @@
           </a:fontRef>
         </p:style>
         <p:txBody>
-          <a:bodyPr rtlCol="0" anchor="ctr" wrap="square" lIns="109728" rIns="109728" tIns="54864" bIns="54864"/>
+          <a:bodyPr wrap="square" lIns="109728" tIns="54864" rIns="109728" bIns="54864" rtlCol="0" anchor="ctr"/>
           <a:lstStyle/>
           <a:p>
             <a:pPr algn="ctr">
@@ -12108,7 +12159,7 @@
           <a:noFill/>
         </p:spPr>
         <p:txBody>
-          <a:bodyPr wrap="square" anchor="t" lIns="109728" rIns="109728" tIns="54864" bIns="54864">
+          <a:bodyPr wrap="square" lIns="109728" tIns="54864" rIns="109728" bIns="54864" anchor="t">
             <a:spAutoFit/>
           </a:bodyPr>
           <a:lstStyle/>
@@ -12235,6 +12286,7 @@
           <a:lstStyle/>
           <a:p>
             <a:pPr algn="ctr"/>
+            <a:endParaRPr/>
           </a:p>
         </p:txBody>
       </p:sp>
@@ -12275,7 +12327,7 @@
           </a:fontRef>
         </p:style>
         <p:txBody>
-          <a:bodyPr rtlCol="0" anchor="ctr" wrap="square" lIns="109728" rIns="109728" tIns="54864" bIns="54864"/>
+          <a:bodyPr wrap="square" lIns="109728" tIns="54864" rIns="109728" bIns="54864" rtlCol="0" anchor="ctr"/>
           <a:lstStyle/>
           <a:p>
             <a:pPr algn="ctr">
@@ -12315,7 +12367,7 @@
           <a:noFill/>
         </p:spPr>
         <p:txBody>
-          <a:bodyPr wrap="square" anchor="t" lIns="109728" rIns="109728" tIns="54864" bIns="54864">
+          <a:bodyPr wrap="square" lIns="109728" tIns="54864" rIns="109728" bIns="54864" anchor="t">
             <a:spAutoFit/>
           </a:bodyPr>
           <a:lstStyle/>
@@ -12406,7 +12458,7 @@
 </file>
 
 <file path=ppt/slides/slide7.xml><?xml version="1.0" encoding="utf-8"?>
-<p:sld xmlns:a="http://schemas.openxmlformats.org/drawingml/2006/main" xmlns:p="http://schemas.openxmlformats.org/presentationml/2006/main" xmlns:r="http://schemas.openxmlformats.org/officeDocument/2006/relationships">
+<p:sld xmlns:a="http://schemas.openxmlformats.org/drawingml/2006/main" xmlns:r="http://schemas.openxmlformats.org/officeDocument/2006/relationships" xmlns:p="http://schemas.openxmlformats.org/presentationml/2006/main">
   <p:cSld>
     <p:spTree>
       <p:nvGrpSpPr>
@@ -12414,7 +12466,14 @@
         <p:cNvGrpSpPr/>
         <p:nvPr/>
       </p:nvGrpSpPr>
-      <p:grpSpPr/>
+      <p:grpSpPr>
+        <a:xfrm>
+          <a:off x="0" y="0"/>
+          <a:ext cx="0" cy="0"/>
+          <a:chOff x="0" y="0"/>
+          <a:chExt cx="0" cy="0"/>
+        </a:xfrm>
+      </p:grpSpPr>
       <p:sp>
         <p:nvSpPr>
           <p:cNvPr id="2" name="Rectangle 1"/>
@@ -12456,6 +12515,7 @@
           <a:lstStyle/>
           <a:p>
             <a:pPr algn="ctr"/>
+            <a:endParaRPr/>
           </a:p>
         </p:txBody>
       </p:sp>
@@ -12500,6 +12560,7 @@
           <a:lstStyle/>
           <a:p>
             <a:pPr algn="ctr"/>
+            <a:endParaRPr/>
           </a:p>
         </p:txBody>
       </p:sp>
@@ -12520,7 +12581,7 @@
           <a:noFill/>
         </p:spPr>
         <p:txBody>
-          <a:bodyPr wrap="square" anchor="t" lIns="109728" rIns="109728" tIns="54864" bIns="54864">
+          <a:bodyPr wrap="square" lIns="109728" tIns="54864" rIns="109728" bIns="54864" anchor="t">
             <a:spAutoFit/>
           </a:bodyPr>
           <a:lstStyle/>
@@ -12562,7 +12623,7 @@
           <a:noFill/>
         </p:spPr>
         <p:txBody>
-          <a:bodyPr wrap="square" anchor="ctr" lIns="109728" rIns="109728" tIns="54864" bIns="54864">
+          <a:bodyPr wrap="square" lIns="109728" tIns="54864" rIns="109728" bIns="54864" anchor="ctr">
             <a:spAutoFit/>
           </a:bodyPr>
           <a:lstStyle/>
@@ -12628,6 +12689,7 @@
           <a:lstStyle/>
           <a:p>
             <a:pPr algn="ctr"/>
+            <a:endParaRPr/>
           </a:p>
         </p:txBody>
       </p:sp>
@@ -12648,7 +12710,7 @@
           <a:noFill/>
         </p:spPr>
         <p:txBody>
-          <a:bodyPr wrap="square" anchor="ctr" lIns="109728" rIns="109728" tIns="54864" bIns="54864">
+          <a:bodyPr wrap="square" lIns="109728" tIns="54864" rIns="109728" bIns="54864" anchor="ctr">
             <a:spAutoFit/>
           </a:bodyPr>
           <a:lstStyle/>
@@ -12690,7 +12752,7 @@
           <a:noFill/>
         </p:spPr>
         <p:txBody>
-          <a:bodyPr wrap="square" anchor="ctr" lIns="109728" rIns="109728" tIns="54864" bIns="54864">
+          <a:bodyPr wrap="square" lIns="109728" tIns="54864" rIns="109728" bIns="54864" anchor="ctr">
             <a:spAutoFit/>
           </a:bodyPr>
           <a:lstStyle/>
@@ -12740,13 +12802,6 @@
             </a:solidFill>
           </a:ln>
           <a:effectLst/>
-          <a:effectLst>
-            <a:outerShdw blurRad="60000" dist="25000" dir="5400000" rotWithShape="0">
-              <a:srgbClr val="1A1A2E">
-                <a:alpha val="22000"/>
-              </a:srgbClr>
-            </a:outerShdw>
-          </a:effectLst>
         </p:spPr>
         <p:style>
           <a:lnRef idx="1">
@@ -12767,6 +12822,7 @@
           <a:lstStyle/>
           <a:p>
             <a:pPr algn="ctr"/>
+            <a:endParaRPr/>
           </a:p>
         </p:txBody>
       </p:sp>
@@ -12811,6 +12867,7 @@
           <a:lstStyle/>
           <a:p>
             <a:pPr algn="ctr"/>
+            <a:endParaRPr/>
           </a:p>
         </p:txBody>
       </p:sp>
@@ -12831,7 +12888,7 @@
           <a:noFill/>
         </p:spPr>
         <p:txBody>
-          <a:bodyPr wrap="square" anchor="t" lIns="109728" rIns="109728" tIns="54864" bIns="54864">
+          <a:bodyPr wrap="square" lIns="109728" tIns="54864" rIns="109728" bIns="54864" anchor="t">
             <a:spAutoFit/>
           </a:bodyPr>
           <a:lstStyle/>
@@ -12900,13 +12957,6 @@
             </a:solidFill>
           </a:ln>
           <a:effectLst/>
-          <a:effectLst>
-            <a:outerShdw blurRad="60000" dist="25000" dir="5400000" rotWithShape="0">
-              <a:srgbClr val="1A1A2E">
-                <a:alpha val="22000"/>
-              </a:srgbClr>
-            </a:outerShdw>
-          </a:effectLst>
         </p:spPr>
         <p:style>
           <a:lnRef idx="1">
@@ -12927,6 +12977,7 @@
           <a:lstStyle/>
           <a:p>
             <a:pPr algn="ctr"/>
+            <a:endParaRPr/>
           </a:p>
         </p:txBody>
       </p:sp>
@@ -12971,6 +13022,7 @@
           <a:lstStyle/>
           <a:p>
             <a:pPr algn="ctr"/>
+            <a:endParaRPr/>
           </a:p>
         </p:txBody>
       </p:sp>
@@ -12991,7 +13043,7 @@
           <a:noFill/>
         </p:spPr>
         <p:txBody>
-          <a:bodyPr wrap="square" anchor="t" lIns="109728" rIns="109728" tIns="54864" bIns="54864">
+          <a:bodyPr wrap="square" lIns="109728" tIns="54864" rIns="109728" bIns="54864" anchor="t">
             <a:spAutoFit/>
           </a:bodyPr>
           <a:lstStyle/>
@@ -13060,13 +13112,6 @@
             </a:solidFill>
           </a:ln>
           <a:effectLst/>
-          <a:effectLst>
-            <a:outerShdw blurRad="60000" dist="25000" dir="5400000" rotWithShape="0">
-              <a:srgbClr val="1A1A2E">
-                <a:alpha val="22000"/>
-              </a:srgbClr>
-            </a:outerShdw>
-          </a:effectLst>
         </p:spPr>
         <p:style>
           <a:lnRef idx="1">
@@ -13087,6 +13132,7 @@
           <a:lstStyle/>
           <a:p>
             <a:pPr algn="ctr"/>
+            <a:endParaRPr/>
           </a:p>
         </p:txBody>
       </p:sp>
@@ -13131,6 +13177,7 @@
           <a:lstStyle/>
           <a:p>
             <a:pPr algn="ctr"/>
+            <a:endParaRPr/>
           </a:p>
         </p:txBody>
       </p:sp>
@@ -13151,7 +13198,7 @@
           <a:noFill/>
         </p:spPr>
         <p:txBody>
-          <a:bodyPr wrap="square" anchor="t" lIns="109728" rIns="109728" tIns="54864" bIns="54864">
+          <a:bodyPr wrap="square" lIns="109728" tIns="54864" rIns="109728" bIns="54864" anchor="t">
             <a:spAutoFit/>
           </a:bodyPr>
           <a:lstStyle/>
@@ -13220,13 +13267,6 @@
             </a:solidFill>
           </a:ln>
           <a:effectLst/>
-          <a:effectLst>
-            <a:outerShdw blurRad="60000" dist="25000" dir="5400000" rotWithShape="0">
-              <a:srgbClr val="1A1A2E">
-                <a:alpha val="22000"/>
-              </a:srgbClr>
-            </a:outerShdw>
-          </a:effectLst>
         </p:spPr>
         <p:style>
           <a:lnRef idx="1">
@@ -13247,6 +13287,7 @@
           <a:lstStyle/>
           <a:p>
             <a:pPr algn="ctr"/>
+            <a:endParaRPr/>
           </a:p>
         </p:txBody>
       </p:sp>
@@ -13291,6 +13332,7 @@
           <a:lstStyle/>
           <a:p>
             <a:pPr algn="ctr"/>
+            <a:endParaRPr/>
           </a:p>
         </p:txBody>
       </p:sp>
@@ -13311,7 +13353,7 @@
           <a:noFill/>
         </p:spPr>
         <p:txBody>
-          <a:bodyPr wrap="square" anchor="t" lIns="109728" rIns="109728" tIns="54864" bIns="54864">
+          <a:bodyPr wrap="square" lIns="109728" tIns="54864" rIns="109728" bIns="54864" anchor="t">
             <a:spAutoFit/>
           </a:bodyPr>
           <a:lstStyle/>
@@ -13364,7 +13406,7 @@
 </file>
 
 <file path=ppt/slides/slide8.xml><?xml version="1.0" encoding="utf-8"?>
-<p:sld xmlns:a="http://schemas.openxmlformats.org/drawingml/2006/main" xmlns:p="http://schemas.openxmlformats.org/presentationml/2006/main" xmlns:r="http://schemas.openxmlformats.org/officeDocument/2006/relationships">
+<p:sld xmlns:a="http://schemas.openxmlformats.org/drawingml/2006/main" xmlns:r="http://schemas.openxmlformats.org/officeDocument/2006/relationships" xmlns:p="http://schemas.openxmlformats.org/presentationml/2006/main">
   <p:cSld>
     <p:spTree>
       <p:nvGrpSpPr>
@@ -13372,7 +13414,14 @@
         <p:cNvGrpSpPr/>
         <p:nvPr/>
       </p:nvGrpSpPr>
-      <p:grpSpPr/>
+      <p:grpSpPr>
+        <a:xfrm>
+          <a:off x="0" y="0"/>
+          <a:ext cx="0" cy="0"/>
+          <a:chOff x="0" y="0"/>
+          <a:chExt cx="0" cy="0"/>
+        </a:xfrm>
+      </p:grpSpPr>
       <p:sp>
         <p:nvSpPr>
           <p:cNvPr id="2" name="Rectangle 1"/>
@@ -13414,6 +13463,7 @@
           <a:lstStyle/>
           <a:p>
             <a:pPr algn="ctr"/>
+            <a:endParaRPr/>
           </a:p>
         </p:txBody>
       </p:sp>
@@ -13458,6 +13508,7 @@
           <a:lstStyle/>
           <a:p>
             <a:pPr algn="ctr"/>
+            <a:endParaRPr/>
           </a:p>
         </p:txBody>
       </p:sp>
@@ -13478,7 +13529,7 @@
           <a:noFill/>
         </p:spPr>
         <p:txBody>
-          <a:bodyPr wrap="square" anchor="t" lIns="109728" rIns="109728" tIns="54864" bIns="54864">
+          <a:bodyPr wrap="square" lIns="109728" tIns="54864" rIns="109728" bIns="54864" anchor="t">
             <a:spAutoFit/>
           </a:bodyPr>
           <a:lstStyle/>
@@ -13520,7 +13571,7 @@
           <a:noFill/>
         </p:spPr>
         <p:txBody>
-          <a:bodyPr wrap="square" anchor="ctr" lIns="109728" rIns="109728" tIns="54864" bIns="54864">
+          <a:bodyPr wrap="square" lIns="109728" tIns="54864" rIns="109728" bIns="54864" anchor="ctr">
             <a:spAutoFit/>
           </a:bodyPr>
           <a:lstStyle/>
@@ -13586,6 +13637,7 @@
           <a:lstStyle/>
           <a:p>
             <a:pPr algn="ctr"/>
+            <a:endParaRPr/>
           </a:p>
         </p:txBody>
       </p:sp>
@@ -13606,7 +13658,7 @@
           <a:noFill/>
         </p:spPr>
         <p:txBody>
-          <a:bodyPr wrap="square" anchor="ctr" lIns="109728" rIns="109728" tIns="54864" bIns="54864">
+          <a:bodyPr wrap="square" lIns="109728" tIns="54864" rIns="109728" bIns="54864" anchor="ctr">
             <a:spAutoFit/>
           </a:bodyPr>
           <a:lstStyle/>
@@ -13648,7 +13700,7 @@
           <a:noFill/>
         </p:spPr>
         <p:txBody>
-          <a:bodyPr wrap="square" anchor="ctr" lIns="109728" rIns="109728" tIns="54864" bIns="54864">
+          <a:bodyPr wrap="square" lIns="109728" tIns="54864" rIns="109728" bIns="54864" anchor="ctr">
             <a:spAutoFit/>
           </a:bodyPr>
           <a:lstStyle/>
@@ -13698,13 +13750,6 @@
             </a:solidFill>
           </a:ln>
           <a:effectLst/>
-          <a:effectLst>
-            <a:outerShdw blurRad="60000" dist="25000" dir="5400000" rotWithShape="0">
-              <a:srgbClr val="1A1A2E">
-                <a:alpha val="22000"/>
-              </a:srgbClr>
-            </a:outerShdw>
-          </a:effectLst>
         </p:spPr>
         <p:style>
           <a:lnRef idx="1">
@@ -13725,6 +13770,7 @@
           <a:lstStyle/>
           <a:p>
             <a:pPr algn="ctr"/>
+            <a:endParaRPr/>
           </a:p>
         </p:txBody>
       </p:sp>
@@ -13769,6 +13815,7 @@
           <a:lstStyle/>
           <a:p>
             <a:pPr algn="ctr"/>
+            <a:endParaRPr/>
           </a:p>
         </p:txBody>
       </p:sp>
@@ -13789,7 +13836,7 @@
           <a:noFill/>
         </p:spPr>
         <p:txBody>
-          <a:bodyPr wrap="square" anchor="t" lIns="109728" rIns="109728" tIns="54864" bIns="54864">
+          <a:bodyPr wrap="square" lIns="109728" tIns="54864" rIns="109728" bIns="54864" anchor="t">
             <a:spAutoFit/>
           </a:bodyPr>
           <a:lstStyle/>
@@ -13858,13 +13905,6 @@
             </a:solidFill>
           </a:ln>
           <a:effectLst/>
-          <a:effectLst>
-            <a:outerShdw blurRad="60000" dist="25000" dir="5400000" rotWithShape="0">
-              <a:srgbClr val="1A1A2E">
-                <a:alpha val="22000"/>
-              </a:srgbClr>
-            </a:outerShdw>
-          </a:effectLst>
         </p:spPr>
         <p:style>
           <a:lnRef idx="1">
@@ -13885,6 +13925,7 @@
           <a:lstStyle/>
           <a:p>
             <a:pPr algn="ctr"/>
+            <a:endParaRPr/>
           </a:p>
         </p:txBody>
       </p:sp>
@@ -13929,6 +13970,7 @@
           <a:lstStyle/>
           <a:p>
             <a:pPr algn="ctr"/>
+            <a:endParaRPr/>
           </a:p>
         </p:txBody>
       </p:sp>
@@ -13949,7 +13991,7 @@
           <a:noFill/>
         </p:spPr>
         <p:txBody>
-          <a:bodyPr wrap="square" anchor="t" lIns="109728" rIns="109728" tIns="54864" bIns="54864">
+          <a:bodyPr wrap="square" lIns="109728" tIns="54864" rIns="109728" bIns="54864" anchor="t">
             <a:spAutoFit/>
           </a:bodyPr>
           <a:lstStyle/>
@@ -14018,13 +14060,6 @@
             </a:solidFill>
           </a:ln>
           <a:effectLst/>
-          <a:effectLst>
-            <a:outerShdw blurRad="60000" dist="25000" dir="5400000" rotWithShape="0">
-              <a:srgbClr val="1A1A2E">
-                <a:alpha val="22000"/>
-              </a:srgbClr>
-            </a:outerShdw>
-          </a:effectLst>
         </p:spPr>
         <p:style>
           <a:lnRef idx="1">
@@ -14045,6 +14080,7 @@
           <a:lstStyle/>
           <a:p>
             <a:pPr algn="ctr"/>
+            <a:endParaRPr/>
           </a:p>
         </p:txBody>
       </p:sp>
@@ -14089,6 +14125,7 @@
           <a:lstStyle/>
           <a:p>
             <a:pPr algn="ctr"/>
+            <a:endParaRPr/>
           </a:p>
         </p:txBody>
       </p:sp>
@@ -14109,7 +14146,7 @@
           <a:noFill/>
         </p:spPr>
         <p:txBody>
-          <a:bodyPr wrap="square" anchor="t" lIns="109728" rIns="109728" tIns="54864" bIns="54864">
+          <a:bodyPr wrap="square" lIns="109728" tIns="54864" rIns="109728" bIns="54864" anchor="t">
             <a:spAutoFit/>
           </a:bodyPr>
           <a:lstStyle/>
@@ -14178,13 +14215,6 @@
             </a:solidFill>
           </a:ln>
           <a:effectLst/>
-          <a:effectLst>
-            <a:outerShdw blurRad="60000" dist="25000" dir="5400000" rotWithShape="0">
-              <a:srgbClr val="1A1A2E">
-                <a:alpha val="22000"/>
-              </a:srgbClr>
-            </a:outerShdw>
-          </a:effectLst>
         </p:spPr>
         <p:style>
           <a:lnRef idx="1">
@@ -14205,6 +14235,7 @@
           <a:lstStyle/>
           <a:p>
             <a:pPr algn="ctr"/>
+            <a:endParaRPr/>
           </a:p>
         </p:txBody>
       </p:sp>
@@ -14249,6 +14280,7 @@
           <a:lstStyle/>
           <a:p>
             <a:pPr algn="ctr"/>
+            <a:endParaRPr/>
           </a:p>
         </p:txBody>
       </p:sp>
@@ -14269,7 +14301,7 @@
           <a:noFill/>
         </p:spPr>
         <p:txBody>
-          <a:bodyPr wrap="square" anchor="t" lIns="109728" rIns="109728" tIns="54864" bIns="54864">
+          <a:bodyPr wrap="square" lIns="109728" tIns="54864" rIns="109728" bIns="54864" anchor="t">
             <a:spAutoFit/>
           </a:bodyPr>
           <a:lstStyle/>
@@ -14322,7 +14354,7 @@
 </file>
 
 <file path=ppt/slides/slide9.xml><?xml version="1.0" encoding="utf-8"?>
-<p:sld xmlns:a="http://schemas.openxmlformats.org/drawingml/2006/main" xmlns:p="http://schemas.openxmlformats.org/presentationml/2006/main" xmlns:r="http://schemas.openxmlformats.org/officeDocument/2006/relationships">
+<p:sld xmlns:a="http://schemas.openxmlformats.org/drawingml/2006/main" xmlns:r="http://schemas.openxmlformats.org/officeDocument/2006/relationships" xmlns:p="http://schemas.openxmlformats.org/presentationml/2006/main">
   <p:cSld>
     <p:spTree>
       <p:nvGrpSpPr>
@@ -14330,7 +14362,14 @@
         <p:cNvGrpSpPr/>
         <p:nvPr/>
       </p:nvGrpSpPr>
-      <p:grpSpPr/>
+      <p:grpSpPr>
+        <a:xfrm>
+          <a:off x="0" y="0"/>
+          <a:ext cx="0" cy="0"/>
+          <a:chOff x="0" y="0"/>
+          <a:chExt cx="0" cy="0"/>
+        </a:xfrm>
+      </p:grpSpPr>
       <p:sp>
         <p:nvSpPr>
           <p:cNvPr id="2" name="Rectangle 1"/>
@@ -14372,6 +14411,7 @@
           <a:lstStyle/>
           <a:p>
             <a:pPr algn="ctr"/>
+            <a:endParaRPr/>
           </a:p>
         </p:txBody>
       </p:sp>
@@ -14416,6 +14456,7 @@
           <a:lstStyle/>
           <a:p>
             <a:pPr algn="ctr"/>
+            <a:endParaRPr/>
           </a:p>
         </p:txBody>
       </p:sp>
@@ -14436,7 +14477,7 @@
           <a:noFill/>
         </p:spPr>
         <p:txBody>
-          <a:bodyPr wrap="square" anchor="t" lIns="109728" rIns="109728" tIns="54864" bIns="54864">
+          <a:bodyPr wrap="square" lIns="109728" tIns="54864" rIns="109728" bIns="54864" anchor="t">
             <a:spAutoFit/>
           </a:bodyPr>
           <a:lstStyle/>
@@ -14478,7 +14519,7 @@
           <a:noFill/>
         </p:spPr>
         <p:txBody>
-          <a:bodyPr wrap="square" anchor="ctr" lIns="109728" rIns="109728" tIns="54864" bIns="54864">
+          <a:bodyPr wrap="square" lIns="109728" tIns="54864" rIns="109728" bIns="54864" anchor="ctr">
             <a:spAutoFit/>
           </a:bodyPr>
           <a:lstStyle/>
@@ -14544,6 +14585,7 @@
           <a:lstStyle/>
           <a:p>
             <a:pPr algn="ctr"/>
+            <a:endParaRPr/>
           </a:p>
         </p:txBody>
       </p:sp>
@@ -14564,7 +14606,7 @@
           <a:noFill/>
         </p:spPr>
         <p:txBody>
-          <a:bodyPr wrap="square" anchor="ctr" lIns="109728" rIns="109728" tIns="54864" bIns="54864">
+          <a:bodyPr wrap="square" lIns="109728" tIns="54864" rIns="109728" bIns="54864" anchor="ctr">
             <a:spAutoFit/>
           </a:bodyPr>
           <a:lstStyle/>
@@ -14606,7 +14648,7 @@
           <a:noFill/>
         </p:spPr>
         <p:txBody>
-          <a:bodyPr wrap="square" anchor="ctr" lIns="109728" rIns="109728" tIns="54864" bIns="54864">
+          <a:bodyPr wrap="square" lIns="109728" tIns="54864" rIns="109728" bIns="54864" anchor="ctr">
             <a:spAutoFit/>
           </a:bodyPr>
           <a:lstStyle/>
@@ -14652,13 +14694,6 @@
             <a:noFill/>
           </a:ln>
           <a:effectLst/>
-          <a:effectLst>
-            <a:outerShdw blurRad="60000" dist="25000" dir="5400000" rotWithShape="0">
-              <a:srgbClr val="1A1A2E">
-                <a:alpha val="22000"/>
-              </a:srgbClr>
-            </a:outerShdw>
-          </a:effectLst>
         </p:spPr>
         <p:style>
           <a:lnRef idx="1">
@@ -14679,6 +14714,7 @@
           <a:lstStyle/>
           <a:p>
             <a:pPr algn="ctr"/>
+            <a:endParaRPr/>
           </a:p>
         </p:txBody>
       </p:sp>
@@ -14699,7 +14735,7 @@
           <a:noFill/>
         </p:spPr>
         <p:txBody>
-          <a:bodyPr wrap="square" anchor="ctr" lIns="109728" rIns="109728" tIns="54864" bIns="54864">
+          <a:bodyPr wrap="square" lIns="109728" tIns="54864" rIns="109728" bIns="54864" anchor="ctr">
             <a:spAutoFit/>
           </a:bodyPr>
           <a:lstStyle/>
@@ -14764,13 +14800,6 @@
             <a:noFill/>
           </a:ln>
           <a:effectLst/>
-          <a:effectLst>
-            <a:outerShdw blurRad="60000" dist="25000" dir="5400000" rotWithShape="0">
-              <a:srgbClr val="1A1A2E">
-                <a:alpha val="22000"/>
-              </a:srgbClr>
-            </a:outerShdw>
-          </a:effectLst>
         </p:spPr>
         <p:style>
           <a:lnRef idx="1">
@@ -14791,6 +14820,7 @@
           <a:lstStyle/>
           <a:p>
             <a:pPr algn="ctr"/>
+            <a:endParaRPr/>
           </a:p>
         </p:txBody>
       </p:sp>
@@ -14811,7 +14841,7 @@
           <a:noFill/>
         </p:spPr>
         <p:txBody>
-          <a:bodyPr wrap="square" anchor="ctr" lIns="109728" rIns="109728" tIns="54864" bIns="54864">
+          <a:bodyPr wrap="square" lIns="109728" tIns="54864" rIns="109728" bIns="54864" anchor="ctr">
             <a:spAutoFit/>
           </a:bodyPr>
           <a:lstStyle/>
@@ -14876,13 +14906,6 @@
             <a:noFill/>
           </a:ln>
           <a:effectLst/>
-          <a:effectLst>
-            <a:outerShdw blurRad="60000" dist="25000" dir="5400000" rotWithShape="0">
-              <a:srgbClr val="1A1A2E">
-                <a:alpha val="22000"/>
-              </a:srgbClr>
-            </a:outerShdw>
-          </a:effectLst>
         </p:spPr>
         <p:style>
           <a:lnRef idx="1">
@@ -14903,6 +14926,7 @@
           <a:lstStyle/>
           <a:p>
             <a:pPr algn="ctr"/>
+            <a:endParaRPr/>
           </a:p>
         </p:txBody>
       </p:sp>
@@ -14923,7 +14947,7 @@
           <a:noFill/>
         </p:spPr>
         <p:txBody>
-          <a:bodyPr wrap="square" anchor="ctr" lIns="109728" rIns="109728" tIns="54864" bIns="54864">
+          <a:bodyPr wrap="square" lIns="109728" tIns="54864" rIns="109728" bIns="54864" anchor="ctr">
             <a:spAutoFit/>
           </a:bodyPr>
           <a:lstStyle/>
@@ -14988,13 +15012,6 @@
             <a:noFill/>
           </a:ln>
           <a:effectLst/>
-          <a:effectLst>
-            <a:outerShdw blurRad="60000" dist="25000" dir="5400000" rotWithShape="0">
-              <a:srgbClr val="1A1A2E">
-                <a:alpha val="22000"/>
-              </a:srgbClr>
-            </a:outerShdw>
-          </a:effectLst>
         </p:spPr>
         <p:style>
           <a:lnRef idx="1">
@@ -15015,6 +15032,7 @@
           <a:lstStyle/>
           <a:p>
             <a:pPr algn="ctr"/>
+            <a:endParaRPr/>
           </a:p>
         </p:txBody>
       </p:sp>
@@ -15035,7 +15053,7 @@
           <a:noFill/>
         </p:spPr>
         <p:txBody>
-          <a:bodyPr wrap="square" anchor="ctr" lIns="109728" rIns="109728" tIns="54864" bIns="54864">
+          <a:bodyPr wrap="square" lIns="109728" tIns="54864" rIns="109728" bIns="54864" anchor="ctr">
             <a:spAutoFit/>
           </a:bodyPr>
           <a:lstStyle/>
@@ -15096,7 +15114,7 @@
           <a:noFill/>
         </p:spPr>
         <p:txBody>
-          <a:bodyPr wrap="square" anchor="t" lIns="109728" rIns="109728" tIns="54864" bIns="54864">
+          <a:bodyPr wrap="square" lIns="109728" tIns="54864" rIns="109728" bIns="54864" anchor="t">
             <a:spAutoFit/>
           </a:bodyPr>
           <a:lstStyle/>
